--- a/media/module3/slides.pptx
+++ b/media/module3/slides.pptx
@@ -25,6 +25,20 @@
     <p:sldId id="273" r:id="rId25"/>
     <p:sldId id="274" r:id="rId26"/>
     <p:sldId id="275" r:id="rId27"/>
+    <p:sldId id="276" r:id="rId28"/>
+    <p:sldId id="277" r:id="rId29"/>
+    <p:sldId id="278" r:id="rId30"/>
+    <p:sldId id="279" r:id="rId31"/>
+    <p:sldId id="280" r:id="rId32"/>
+    <p:sldId id="281" r:id="rId33"/>
+    <p:sldId id="282" r:id="rId34"/>
+    <p:sldId id="283" r:id="rId35"/>
+    <p:sldId id="284" r:id="rId36"/>
+    <p:sldId id="285" r:id="rId37"/>
+    <p:sldId id="286" r:id="rId38"/>
+    <p:sldId id="287" r:id="rId39"/>
+    <p:sldId id="288" r:id="rId40"/>
+    <p:sldId id="289" r:id="rId41"/>
   </p:sldIdLst>
   <p:sldSz cx="12191695" cy="6858000" type="screen4x3"/>
   <p:notesSz cx="6858000" cy="9144000"/>
@@ -521,7 +535,497 @@
           <a:lstStyle/>
           <a:p>
             <a:r>
+              <a:t>From docs/MODULE3.md — read guides before running demos.</a:t>
+            </a:r>
+          </a:p>
+        </p:txBody>
+      </p:sp>
+      <p:sp>
+        <p:nvSpPr>
+          <p:cNvPr id="4" name="Slide Number Placeholder 3"/>
+          <p:cNvSpPr>
+            <a:spLocks noGrp="1"/>
+          </p:cNvSpPr>
+          <p:nvPr>
+            <p:ph type="sldNum" idx="5" sz="quarter"/>
+          </p:nvPr>
+        </p:nvSpPr>
+        <p:spPr/>
+      </p:sp>
+    </p:spTree>
+  </p:cSld>
+  <p:clrMapOvr>
+    <a:masterClrMapping/>
+  </p:clrMapOvr>
+</p:notes>
+</file>
+
+<file path=ppt/notesSlides/notesSlide10.xml><?xml version="1.0" encoding="utf-8"?>
+<p:notes xmlns:a="http://schemas.openxmlformats.org/drawingml/2006/main" xmlns:p="http://schemas.openxmlformats.org/presentationml/2006/main" xmlns:r="http://schemas.openxmlformats.org/officeDocument/2006/relationships">
+  <p:cSld>
+    <p:spTree>
+      <p:nvGrpSpPr>
+        <p:cNvPr id="1" name=""/>
+        <p:cNvGrpSpPr/>
+        <p:nvPr/>
+      </p:nvGrpSpPr>
+      <p:grpSpPr>
+        <a:xfrm>
+          <a:off x="0" y="0"/>
+          <a:ext cx="0" cy="0"/>
+          <a:chOff x="0" y="0"/>
+          <a:chExt cx="0" cy="0"/>
+        </a:xfrm>
+      </p:grpSpPr>
+      <p:sp>
+        <p:nvSpPr>
+          <p:cNvPr id="2" name="Slide Image Placeholder 1"/>
+          <p:cNvSpPr>
+            <a:spLocks noGrp="1"/>
+          </p:cNvSpPr>
+          <p:nvPr>
+            <p:ph type="sldImg" idx="2"/>
+          </p:nvPr>
+        </p:nvSpPr>
+        <p:spPr/>
+      </p:sp>
+      <p:sp>
+        <p:nvSpPr>
+          <p:cNvPr id="3" name="Notes Placeholder 2"/>
+          <p:cNvSpPr>
+            <a:spLocks noGrp="1"/>
+          </p:cNvSpPr>
+          <p:nvPr>
+            <p:ph type="body" idx="3" sz="quarter"/>
+          </p:nvPr>
+        </p:nvSpPr>
+        <p:spPr/>
+        <p:txBody>
+          <a:bodyPr/>
+          <a:lstStyle/>
+          <a:p>
+            <a:r>
               <a:t>From MODULE3 Topics Covered.</a:t>
+            </a:r>
+          </a:p>
+        </p:txBody>
+      </p:sp>
+      <p:sp>
+        <p:nvSpPr>
+          <p:cNvPr id="4" name="Slide Number Placeholder 3"/>
+          <p:cNvSpPr>
+            <a:spLocks noGrp="1"/>
+          </p:cNvSpPr>
+          <p:nvPr>
+            <p:ph type="sldNum" idx="5" sz="quarter"/>
+          </p:nvPr>
+        </p:nvSpPr>
+        <p:spPr/>
+      </p:sp>
+    </p:spTree>
+  </p:cSld>
+  <p:clrMapOvr>
+    <a:masterClrMapping/>
+  </p:clrMapOvr>
+</p:notes>
+</file>
+
+<file path=ppt/notesSlides/notesSlide11.xml><?xml version="1.0" encoding="utf-8"?>
+<p:notes xmlns:a="http://schemas.openxmlformats.org/drawingml/2006/main" xmlns:p="http://schemas.openxmlformats.org/presentationml/2006/main" xmlns:r="http://schemas.openxmlformats.org/officeDocument/2006/relationships">
+  <p:cSld>
+    <p:spTree>
+      <p:nvGrpSpPr>
+        <p:cNvPr id="1" name=""/>
+        <p:cNvGrpSpPr/>
+        <p:nvPr/>
+      </p:nvGrpSpPr>
+      <p:grpSpPr>
+        <a:xfrm>
+          <a:off x="0" y="0"/>
+          <a:ext cx="0" cy="0"/>
+          <a:chOff x="0" y="0"/>
+          <a:chExt cx="0" cy="0"/>
+        </a:xfrm>
+      </p:grpSpPr>
+      <p:sp>
+        <p:nvSpPr>
+          <p:cNvPr id="2" name="Slide Image Placeholder 1"/>
+          <p:cNvSpPr>
+            <a:spLocks noGrp="1"/>
+          </p:cNvSpPr>
+          <p:nvPr>
+            <p:ph type="sldImg" idx="2"/>
+          </p:nvPr>
+        </p:nvSpPr>
+        <p:spPr/>
+      </p:sp>
+      <p:sp>
+        <p:nvSpPr>
+          <p:cNvPr id="3" name="Notes Placeholder 2"/>
+          <p:cNvSpPr>
+            <a:spLocks noGrp="1"/>
+          </p:cNvSpPr>
+          <p:nvPr>
+            <p:ph type="body" idx="3" sz="quarter"/>
+          </p:nvPr>
+        </p:nvSpPr>
+        <p:spPr/>
+        <p:txBody>
+          <a:bodyPr/>
+          <a:lstStyle/>
+          <a:p>
+            <a:r>
+              <a:t>From MODULE3 Topics Covered.</a:t>
+            </a:r>
+          </a:p>
+        </p:txBody>
+      </p:sp>
+      <p:sp>
+        <p:nvSpPr>
+          <p:cNvPr id="4" name="Slide Number Placeholder 3"/>
+          <p:cNvSpPr>
+            <a:spLocks noGrp="1"/>
+          </p:cNvSpPr>
+          <p:nvPr>
+            <p:ph type="sldNum" idx="5" sz="quarter"/>
+          </p:nvPr>
+        </p:nvSpPr>
+        <p:spPr/>
+      </p:sp>
+    </p:spTree>
+  </p:cSld>
+  <p:clrMapOvr>
+    <a:masterClrMapping/>
+  </p:clrMapOvr>
+</p:notes>
+</file>
+
+<file path=ppt/notesSlides/notesSlide12.xml><?xml version="1.0" encoding="utf-8"?>
+<p:notes xmlns:a="http://schemas.openxmlformats.org/drawingml/2006/main" xmlns:p="http://schemas.openxmlformats.org/presentationml/2006/main" xmlns:r="http://schemas.openxmlformats.org/officeDocument/2006/relationships">
+  <p:cSld>
+    <p:spTree>
+      <p:nvGrpSpPr>
+        <p:cNvPr id="1" name=""/>
+        <p:cNvGrpSpPr/>
+        <p:nvPr/>
+      </p:nvGrpSpPr>
+      <p:grpSpPr>
+        <a:xfrm>
+          <a:off x="0" y="0"/>
+          <a:ext cx="0" cy="0"/>
+          <a:chOff x="0" y="0"/>
+          <a:chExt cx="0" cy="0"/>
+        </a:xfrm>
+      </p:grpSpPr>
+      <p:sp>
+        <p:nvSpPr>
+          <p:cNvPr id="2" name="Slide Image Placeholder 1"/>
+          <p:cNvSpPr>
+            <a:spLocks noGrp="1"/>
+          </p:cNvSpPr>
+          <p:nvPr>
+            <p:ph type="sldImg" idx="2"/>
+          </p:nvPr>
+        </p:nvSpPr>
+        <p:spPr/>
+      </p:sp>
+      <p:sp>
+        <p:nvSpPr>
+          <p:cNvPr id="3" name="Notes Placeholder 2"/>
+          <p:cNvSpPr>
+            <a:spLocks noGrp="1"/>
+          </p:cNvSpPr>
+          <p:nvPr>
+            <p:ph type="body" idx="3" sz="quarter"/>
+          </p:nvPr>
+        </p:nvSpPr>
+        <p:spPr/>
+        <p:txBody>
+          <a:bodyPr/>
+          <a:lstStyle/>
+          <a:p>
+            <a:r>
+              <a:t>From MODULE3 Topics Covered.</a:t>
+            </a:r>
+          </a:p>
+        </p:txBody>
+      </p:sp>
+      <p:sp>
+        <p:nvSpPr>
+          <p:cNvPr id="4" name="Slide Number Placeholder 3"/>
+          <p:cNvSpPr>
+            <a:spLocks noGrp="1"/>
+          </p:cNvSpPr>
+          <p:nvPr>
+            <p:ph type="sldNum" idx="5" sz="quarter"/>
+          </p:nvPr>
+        </p:nvSpPr>
+        <p:spPr/>
+      </p:sp>
+    </p:spTree>
+  </p:cSld>
+  <p:clrMapOvr>
+    <a:masterClrMapping/>
+  </p:clrMapOvr>
+</p:notes>
+</file>
+
+<file path=ppt/notesSlides/notesSlide13.xml><?xml version="1.0" encoding="utf-8"?>
+<p:notes xmlns:a="http://schemas.openxmlformats.org/drawingml/2006/main" xmlns:p="http://schemas.openxmlformats.org/presentationml/2006/main" xmlns:r="http://schemas.openxmlformats.org/officeDocument/2006/relationships">
+  <p:cSld>
+    <p:spTree>
+      <p:nvGrpSpPr>
+        <p:cNvPr id="1" name=""/>
+        <p:cNvGrpSpPr/>
+        <p:nvPr/>
+      </p:nvGrpSpPr>
+      <p:grpSpPr>
+        <a:xfrm>
+          <a:off x="0" y="0"/>
+          <a:ext cx="0" cy="0"/>
+          <a:chOff x="0" y="0"/>
+          <a:chExt cx="0" cy="0"/>
+        </a:xfrm>
+      </p:grpSpPr>
+      <p:sp>
+        <p:nvSpPr>
+          <p:cNvPr id="2" name="Slide Image Placeholder 1"/>
+          <p:cNvSpPr>
+            <a:spLocks noGrp="1"/>
+          </p:cNvSpPr>
+          <p:nvPr>
+            <p:ph type="sldImg" idx="2"/>
+          </p:nvPr>
+        </p:nvSpPr>
+        <p:spPr/>
+      </p:sp>
+      <p:sp>
+        <p:nvSpPr>
+          <p:cNvPr id="3" name="Notes Placeholder 2"/>
+          <p:cNvSpPr>
+            <a:spLocks noGrp="1"/>
+          </p:cNvSpPr>
+          <p:nvPr>
+            <p:ph type="body" idx="3" sz="quarter"/>
+          </p:nvPr>
+        </p:nvSpPr>
+        <p:spPr/>
+        <p:txBody>
+          <a:bodyPr/>
+          <a:lstStyle/>
+          <a:p>
+            <a:r>
+              <a:t>Run from course repository root.</a:t>
+            </a:r>
+          </a:p>
+        </p:txBody>
+      </p:sp>
+      <p:sp>
+        <p:nvSpPr>
+          <p:cNvPr id="4" name="Slide Number Placeholder 3"/>
+          <p:cNvSpPr>
+            <a:spLocks noGrp="1"/>
+          </p:cNvSpPr>
+          <p:nvPr>
+            <p:ph type="sldNum" idx="5" sz="quarter"/>
+          </p:nvPr>
+        </p:nvSpPr>
+        <p:spPr/>
+      </p:sp>
+    </p:spTree>
+  </p:cSld>
+  <p:clrMapOvr>
+    <a:masterClrMapping/>
+  </p:clrMapOvr>
+</p:notes>
+</file>
+
+<file path=ppt/notesSlides/notesSlide14.xml><?xml version="1.0" encoding="utf-8"?>
+<p:notes xmlns:a="http://schemas.openxmlformats.org/drawingml/2006/main" xmlns:p="http://schemas.openxmlformats.org/presentationml/2006/main" xmlns:r="http://schemas.openxmlformats.org/officeDocument/2006/relationships">
+  <p:cSld>
+    <p:spTree>
+      <p:nvGrpSpPr>
+        <p:cNvPr id="1" name=""/>
+        <p:cNvGrpSpPr/>
+        <p:nvPr/>
+      </p:nvGrpSpPr>
+      <p:grpSpPr>
+        <a:xfrm>
+          <a:off x="0" y="0"/>
+          <a:ext cx="0" cy="0"/>
+          <a:chOff x="0" y="0"/>
+          <a:chExt cx="0" cy="0"/>
+        </a:xfrm>
+      </p:grpSpPr>
+      <p:sp>
+        <p:nvSpPr>
+          <p:cNvPr id="2" name="Slide Image Placeholder 1"/>
+          <p:cNvSpPr>
+            <a:spLocks noGrp="1"/>
+          </p:cNvSpPr>
+          <p:nvPr>
+            <p:ph type="sldImg" idx="2"/>
+          </p:nvPr>
+        </p:nvSpPr>
+        <p:spPr/>
+      </p:sp>
+      <p:sp>
+        <p:nvSpPr>
+          <p:cNvPr id="3" name="Notes Placeholder 2"/>
+          <p:cNvSpPr>
+            <a:spLocks noGrp="1"/>
+          </p:cNvSpPr>
+          <p:nvPr>
+            <p:ph type="body" idx="3" sz="quarter"/>
+          </p:nvPr>
+        </p:nvSpPr>
+        <p:spPr/>
+        <p:txBody>
+          <a:bodyPr/>
+          <a:lstStyle/>
+          <a:p>
+            <a:r>
+              <a:t>module3/examples/examples/uart_baseline/README.md</a:t>
+            </a:r>
+          </a:p>
+        </p:txBody>
+      </p:sp>
+      <p:sp>
+        <p:nvSpPr>
+          <p:cNvPr id="4" name="Slide Number Placeholder 3"/>
+          <p:cNvSpPr>
+            <a:spLocks noGrp="1"/>
+          </p:cNvSpPr>
+          <p:nvPr>
+            <p:ph type="sldNum" idx="5" sz="quarter"/>
+          </p:nvPr>
+        </p:nvSpPr>
+        <p:spPr/>
+      </p:sp>
+    </p:spTree>
+  </p:cSld>
+  <p:clrMapOvr>
+    <a:masterClrMapping/>
+  </p:clrMapOvr>
+</p:notes>
+</file>
+
+<file path=ppt/notesSlides/notesSlide15.xml><?xml version="1.0" encoding="utf-8"?>
+<p:notes xmlns:a="http://schemas.openxmlformats.org/drawingml/2006/main" xmlns:p="http://schemas.openxmlformats.org/presentationml/2006/main" xmlns:r="http://schemas.openxmlformats.org/officeDocument/2006/relationships">
+  <p:cSld>
+    <p:spTree>
+      <p:nvGrpSpPr>
+        <p:cNvPr id="1" name=""/>
+        <p:cNvGrpSpPr/>
+        <p:nvPr/>
+      </p:nvGrpSpPr>
+      <p:grpSpPr>
+        <a:xfrm>
+          <a:off x="0" y="0"/>
+          <a:ext cx="0" cy="0"/>
+          <a:chOff x="0" y="0"/>
+          <a:chExt cx="0" cy="0"/>
+        </a:xfrm>
+      </p:grpSpPr>
+      <p:sp>
+        <p:nvSpPr>
+          <p:cNvPr id="2" name="Slide Image Placeholder 1"/>
+          <p:cNvSpPr>
+            <a:spLocks noGrp="1"/>
+          </p:cNvSpPr>
+          <p:nvPr>
+            <p:ph type="sldImg" idx="2"/>
+          </p:nvPr>
+        </p:nvSpPr>
+        <p:spPr/>
+      </p:sp>
+      <p:sp>
+        <p:nvSpPr>
+          <p:cNvPr id="3" name="Notes Placeholder 2"/>
+          <p:cNvSpPr>
+            <a:spLocks noGrp="1"/>
+          </p:cNvSpPr>
+          <p:nvPr>
+            <p:ph type="body" idx="3" sz="quarter"/>
+          </p:nvPr>
+        </p:nvSpPr>
+        <p:spPr/>
+        <p:txBody>
+          <a:bodyPr/>
+          <a:lstStyle/>
+          <a:p>
+            <a:r>
+              <a:t>Hands-on: module3/examples/examples/uart_baseline/</a:t>
+            </a:r>
+          </a:p>
+        </p:txBody>
+      </p:sp>
+      <p:sp>
+        <p:nvSpPr>
+          <p:cNvPr id="4" name="Slide Number Placeholder 3"/>
+          <p:cNvSpPr>
+            <a:spLocks noGrp="1"/>
+          </p:cNvSpPr>
+          <p:nvPr>
+            <p:ph type="sldNum" idx="5" sz="quarter"/>
+          </p:nvPr>
+        </p:nvSpPr>
+        <p:spPr/>
+      </p:sp>
+    </p:spTree>
+  </p:cSld>
+  <p:clrMapOvr>
+    <a:masterClrMapping/>
+  </p:clrMapOvr>
+</p:notes>
+</file>
+
+<file path=ppt/notesSlides/notesSlide16.xml><?xml version="1.0" encoding="utf-8"?>
+<p:notes xmlns:a="http://schemas.openxmlformats.org/drawingml/2006/main" xmlns:p="http://schemas.openxmlformats.org/presentationml/2006/main" xmlns:r="http://schemas.openxmlformats.org/officeDocument/2006/relationships">
+  <p:cSld>
+    <p:spTree>
+      <p:nvGrpSpPr>
+        <p:cNvPr id="1" name=""/>
+        <p:cNvGrpSpPr/>
+        <p:nvPr/>
+      </p:nvGrpSpPr>
+      <p:grpSpPr>
+        <a:xfrm>
+          <a:off x="0" y="0"/>
+          <a:ext cx="0" cy="0"/>
+          <a:chOff x="0" y="0"/>
+          <a:chExt cx="0" cy="0"/>
+        </a:xfrm>
+      </p:grpSpPr>
+      <p:sp>
+        <p:nvSpPr>
+          <p:cNvPr id="2" name="Slide Image Placeholder 1"/>
+          <p:cNvSpPr>
+            <a:spLocks noGrp="1"/>
+          </p:cNvSpPr>
+          <p:nvPr>
+            <p:ph type="sldImg" idx="2"/>
+          </p:nvPr>
+        </p:nvSpPr>
+        <p:spPr/>
+      </p:sp>
+      <p:sp>
+        <p:nvSpPr>
+          <p:cNvPr id="3" name="Notes Placeholder 2"/>
+          <p:cNvSpPr>
+            <a:spLocks noGrp="1"/>
+          </p:cNvSpPr>
+          <p:nvPr>
+            <p:ph type="body" idx="3" sz="quarter"/>
+          </p:nvPr>
+        </p:nvSpPr>
+        <p:spPr/>
+        <p:txBody>
+          <a:bodyPr/>
+          <a:lstStyle/>
+          <a:p>
+            <a:r>
+              <a:t>From MODULE3 Learning Outcomes.</a:t>
             </a:r>
           </a:p>
         </p:txBody>
@@ -591,7 +1095,7 @@
           <a:lstStyle/>
           <a:p>
             <a:r>
-              <a:t>From MODULE3 Topics Covered.</a:t>
+              <a:t>From MODULE3 Design Architecture.</a:t>
             </a:r>
           </a:p>
         </p:txBody>
@@ -661,7 +1165,7 @@
           <a:lstStyle/>
           <a:p>
             <a:r>
-              <a:t>From MODULE3 Topics Covered.</a:t>
+              <a:t>From MODULE3 Design Architecture.</a:t>
             </a:r>
           </a:p>
         </p:txBody>
@@ -731,7 +1235,7 @@
           <a:lstStyle/>
           <a:p>
             <a:r>
-              <a:t>From MODULE3 Topics Covered.</a:t>
+              <a:t>From MODULE3 Design Architecture.</a:t>
             </a:r>
           </a:p>
         </p:txBody>
@@ -801,7 +1305,7 @@
           <a:lstStyle/>
           <a:p>
             <a:r>
-              <a:t>From MODULE3 Topics Covered.</a:t>
+              <a:t>From MODULE3 Verification &amp; Testing Methods.</a:t>
             </a:r>
           </a:p>
         </p:txBody>
@@ -871,7 +1375,7 @@
           <a:lstStyle/>
           <a:p>
             <a:r>
-              <a:t>From MODULE3 Topics Covered.</a:t>
+              <a:t>From MODULE3 Verification &amp; Testing Methods.</a:t>
             </a:r>
           </a:p>
         </p:txBody>
@@ -941,7 +1445,7 @@
           <a:lstStyle/>
           <a:p>
             <a:r>
-              <a:t>Run from course repository root.</a:t>
+              <a:t>From MODULE3 Verification &amp; Testing Methods.</a:t>
             </a:r>
           </a:p>
         </p:txBody>
@@ -1011,7 +1515,7 @@
           <a:lstStyle/>
           <a:p>
             <a:r>
-              <a:t>module3/examples/uart_baseline/README.md</a:t>
+              <a:t>From MODULE3 Topics Covered.</a:t>
             </a:r>
           </a:p>
         </p:txBody>
@@ -1081,7 +1585,7 @@
           <a:lstStyle/>
           <a:p>
             <a:r>
-              <a:t>Hands-on: module3/examples/uart_baseline/</a:t>
+              <a:t>From MODULE3 Topics Covered.</a:t>
             </a:r>
           </a:p>
         </p:txBody>
@@ -4239,21 +4743,45 @@
               </a:defRPr>
             </a:pPr>
             <a:r>
-              <a:t>1. UART Protocol (8N1) (4/4)</a:t>
-            </a:r>
-          </a:p>
-        </p:txBody>
-      </p:sp>
-      <p:sp>
-        <p:nvSpPr>
-          <p:cNvPr id="3" name="TextBox 2"/>
+              <a:t>Verification environment architecture</a:t>
+            </a:r>
+          </a:p>
+        </p:txBody>
+      </p:sp>
+      <p:pic>
+        <p:nvPicPr>
+          <p:cNvPr id="3" name="Picture 2" descr="verification_architecture.png"/>
+          <p:cNvPicPr>
+            <a:picLocks noChangeAspect="1"/>
+          </p:cNvPicPr>
+          <p:nvPr/>
+        </p:nvPicPr>
+        <p:blipFill>
+          <a:blip r:embed="rId2"/>
+          <a:stretch>
+            <a:fillRect/>
+          </a:stretch>
+        </p:blipFill>
+        <p:spPr>
+          <a:xfrm>
+            <a:off x="548640" y="1143000"/>
+            <a:ext cx="8128000" cy="4572000"/>
+          </a:xfrm>
+          <a:prstGeom prst="rect">
+            <a:avLst/>
+          </a:prstGeom>
+        </p:spPr>
+      </p:pic>
+      <p:sp>
+        <p:nvSpPr>
+          <p:cNvPr id="4" name="TextBox 3"/>
           <p:cNvSpPr txBox="1"/>
           <p:nvPr/>
         </p:nvSpPr>
         <p:spPr>
           <a:xfrm>
-            <a:off x="548640" y="1234440"/>
-            <a:ext cx="11064240" cy="4937760"/>
+            <a:off x="548640" y="5897880"/>
+            <a:ext cx="11064240" cy="411480"/>
           </a:xfrm>
           <a:prstGeom prst="rect">
             <a:avLst/>
@@ -4270,139 +4798,22 @@
               <a:lnSpc>
                 <a:spcPts val="2200"/>
               </a:lnSpc>
-              <a:spcAft>
-                <a:spcPts val="1000"/>
-              </a:spcAft>
-              <a:defRPr sz="2000" b="0">
-                <a:solidFill>
-                  <a:srgbClr val="333333"/>
-                </a:solidFill>
-                <a:latin typeface="Calibri"/>
-              </a:defRPr>
-            </a:pPr>
-            <a:r>
-              <a:t>• Parity: Even/odd/mark/space; adds a parity bit</a:t>
-            </a:r>
-          </a:p>
-          <a:p>
-            <a:pPr>
-              <a:lnSpc>
-                <a:spcPts val="2200"/>
-              </a:lnSpc>
-              <a:spcAft>
-                <a:spcPts val="1000"/>
-              </a:spcAft>
-              <a:defRPr sz="2000" b="0">
-                <a:solidFill>
-                  <a:srgbClr val="333333"/>
-                </a:solidFill>
-                <a:latin typeface="Calibri"/>
-              </a:defRPr>
-            </a:pPr>
-            <a:r>
-              <a:t>      before stop.</a:t>
-            </a:r>
-          </a:p>
-          <a:p>
-            <a:pPr>
-              <a:lnSpc>
-                <a:spcPts val="2200"/>
-              </a:lnSpc>
-              <a:spcAft>
-                <a:spcPts val="1000"/>
-              </a:spcAft>
-              <a:defRPr sz="2000" b="0">
-                <a:solidFill>
-                  <a:srgbClr val="333333"/>
-                </a:solidFill>
-                <a:latin typeface="Calibri"/>
-              </a:defRPr>
-            </a:pPr>
-            <a:r>
-              <a:t>• Stop bits: 1 or 2 stop bits.</a:t>
-            </a:r>
-          </a:p>
-          <a:p>
-            <a:pPr>
-              <a:lnSpc>
-                <a:spcPts val="2200"/>
-              </a:lnSpc>
-              <a:spcAft>
-                <a:spcPts val="1000"/>
-              </a:spcAft>
-              <a:defRPr sz="2000" b="0">
-                <a:solidFill>
-                  <a:srgbClr val="333333"/>
-                </a:solidFill>
-                <a:latin typeface="Calibri"/>
-              </a:defRPr>
-            </a:pPr>
-            <a:r>
-              <a:t>• Flow control: RTS/CTS hardware pins (outside the</a:t>
-            </a:r>
-          </a:p>
-          <a:p>
-            <a:pPr>
-              <a:lnSpc>
-                <a:spcPts val="2200"/>
-              </a:lnSpc>
-              <a:spcAft>
-                <a:spcPts val="1000"/>
-              </a:spcAft>
-              <a:defRPr sz="2000" b="0">
-                <a:solidFill>
-                  <a:srgbClr val="333333"/>
-                </a:solidFill>
-                <a:latin typeface="Calibri"/>
-              </a:defRPr>
-            </a:pPr>
-            <a:r>
-              <a:t>      serial line) to throttle traffic.</a:t>
-            </a:r>
-          </a:p>
-          <a:p>
-            <a:pPr>
-              <a:lnSpc>
-                <a:spcPts val="2200"/>
-              </a:lnSpc>
-              <a:spcAft>
-                <a:spcPts val="1000"/>
-              </a:spcAft>
-              <a:defRPr sz="2000" b="0">
-                <a:solidFill>
-                  <a:srgbClr val="333333"/>
-                </a:solidFill>
-                <a:latin typeface="Calibri"/>
-              </a:defRPr>
-            </a:pPr>
-            <a:r>
-              <a:t>• The baseline RTL assumes 8N1 with no parity and no</a:t>
-            </a:r>
-          </a:p>
-          <a:p>
-            <a:pPr>
-              <a:lnSpc>
-                <a:spcPts val="2200"/>
-              </a:lnSpc>
-              <a:spcAft>
-                <a:spcPts val="1000"/>
-              </a:spcAft>
-              <a:defRPr sz="2000" b="0">
-                <a:solidFill>
-                  <a:srgbClr val="333333"/>
-                </a:solidFill>
-                <a:latin typeface="Calibri"/>
-              </a:defRPr>
-            </a:pPr>
-            <a:r>
-              <a:t>      flow control.</a:t>
-            </a:r>
-          </a:p>
-        </p:txBody>
-      </p:sp>
-      <p:sp>
-        <p:nvSpPr>
-          <p:cNvPr id="4" name="TextBox 3"/>
+              <a:defRPr sz="1200" b="0">
+                <a:solidFill>
+                  <a:srgbClr val="333333"/>
+                </a:solidFill>
+                <a:latin typeface="Calibri"/>
+              </a:defRPr>
+            </a:pPr>
+            <a:r>
+              <a:t>Module 3: UVM layers, agents, and checkers for this phase.</a:t>
+            </a:r>
+          </a:p>
+        </p:txBody>
+      </p:sp>
+      <p:sp>
+        <p:nvSpPr>
+          <p:cNvPr id="5" name="TextBox 4"/>
           <p:cNvSpPr txBox="1"/>
           <p:nvPr/>
         </p:nvSpPr>
@@ -4491,7 +4902,7 @@
               </a:defRPr>
             </a:pPr>
             <a:r>
-              <a:t>2. RTL Architecture</a:t>
+              <a:t>1. Block hierarchy</a:t>
             </a:r>
           </a:p>
         </p:txBody>
@@ -4533,102 +4944,64 @@
               </a:defRPr>
             </a:pPr>
             <a:r>
-              <a:t>• baud_gen: Divides `clk`; outputs `baud_tick` one</a:t>
-            </a:r>
-          </a:p>
-          <a:p>
-            <a:pPr>
-              <a:lnSpc>
-                <a:spcPts val="2200"/>
-              </a:lnSpc>
-              <a:spcAft>
-                <a:spcPts val="1000"/>
-              </a:spcAft>
-              <a:defRPr sz="2000" b="0">
-                <a:solidFill>
-                  <a:srgbClr val="333333"/>
-                </a:solidFill>
-                <a:latin typeface="Calibri"/>
-              </a:defRPr>
-            </a:pPr>
-            <a:r>
-              <a:t>      cycle every DIVIDER cycles.</a:t>
-            </a:r>
-          </a:p>
-          <a:p>
-            <a:pPr>
-              <a:lnSpc>
-                <a:spcPts val="2200"/>
-              </a:lnSpc>
-              <a:spcAft>
-                <a:spcPts val="1000"/>
-              </a:spcAft>
-              <a:defRPr sz="2000" b="0">
-                <a:solidFill>
-                  <a:srgbClr val="333333"/>
-                </a:solidFill>
-                <a:latin typeface="Calibri"/>
-              </a:defRPr>
-            </a:pPr>
-            <a:r>
-              <a:t>• uart_tx: On `start`, loads `data_in` into shift</a:t>
-            </a:r>
-          </a:p>
-          <a:p>
-            <a:pPr>
-              <a:lnSpc>
-                <a:spcPts val="2200"/>
-              </a:lnSpc>
-              <a:spcAft>
-                <a:spcPts val="1000"/>
-              </a:spcAft>
-              <a:defRPr sz="2000" b="0">
-                <a:solidFill>
-                  <a:srgbClr val="333333"/>
-                </a:solidFill>
-                <a:latin typeface="Calibri"/>
-              </a:defRPr>
-            </a:pPr>
-            <a:r>
-              <a:t>      register; outputs one bit per `baud_tick` (start, d…</a:t>
-            </a:r>
-          </a:p>
-          <a:p>
-            <a:pPr>
-              <a:lnSpc>
-                <a:spcPts val="2200"/>
-              </a:lnSpc>
-              <a:spcAft>
-                <a:spcPts val="1000"/>
-              </a:spcAft>
-              <a:defRPr sz="2000" b="0">
-                <a:solidFill>
-                  <a:srgbClr val="333333"/>
-                </a:solidFill>
-                <a:latin typeface="Calibri"/>
-              </a:defRPr>
-            </a:pPr>
-            <a:r>
-              <a:t>• uart_rx: Detects start bit (line low), samples one</a:t>
-            </a:r>
-          </a:p>
-          <a:p>
-            <a:pPr>
-              <a:lnSpc>
-                <a:spcPts val="2200"/>
-              </a:lnSpc>
-              <a:spcAft>
-                <a:spcPts val="1000"/>
-              </a:spcAft>
-              <a:defRPr sz="2000" b="0">
-                <a:solidFill>
-                  <a:srgbClr val="333333"/>
-                </a:solidFill>
-                <a:latin typeface="Calibri"/>
-              </a:defRPr>
-            </a:pPr>
-            <a:r>
-              <a:t>      bit per `baud_tick`, reconstructs byte; pulses `…</a:t>
+              <a:t>• top_uart_baseline → `baud_gen`, `uart_tx`,</a:t>
+            </a:r>
+          </a:p>
+          <a:p>
+            <a:pPr>
+              <a:lnSpc>
+                <a:spcPts val="2200"/>
+              </a:lnSpc>
+              <a:spcAft>
+                <a:spcPts val="1000"/>
+              </a:spcAft>
+              <a:defRPr sz="2000" b="0">
+                <a:solidFill>
+                  <a:srgbClr val="333333"/>
+                </a:solidFill>
+                <a:latin typeface="Calibri"/>
+              </a:defRPr>
+            </a:pPr>
+            <a:r>
+              <a:t>      `uart_rx`; sim_main.cpp drives `clk`/`rst_n` only.</a:t>
+            </a:r>
+          </a:p>
+          <a:p>
+            <a:pPr>
+              <a:lnSpc>
+                <a:spcPts val="2200"/>
+              </a:lnSpc>
+              <a:spcAft>
+                <a:spcPts val="1000"/>
+              </a:spcAft>
+              <a:defRPr sz="2000" b="0">
+                <a:solidFill>
+                  <a:srgbClr val="333333"/>
+                </a:solidFill>
+                <a:latin typeface="Calibri"/>
+              </a:defRPr>
+            </a:pPr>
+            <a:r>
+              <a:t>• Loopback: `assign rx = tx` — one wire connects</a:t>
+            </a:r>
+          </a:p>
+          <a:p>
+            <a:pPr>
+              <a:lnSpc>
+                <a:spcPts val="2200"/>
+              </a:lnSpc>
+              <a:spcAft>
+                <a:spcPts val="1000"/>
+              </a:spcAft>
+              <a:defRPr sz="2000" b="0">
+                <a:solidFill>
+                  <a:srgbClr val="333333"/>
+                </a:solidFill>
+                <a:latin typeface="Calibri"/>
+              </a:defRPr>
+            </a:pPr>
+            <a:r>
+              <a:t>      transmitter to receiver.</a:t>
             </a:r>
           </a:p>
         </p:txBody>
@@ -4724,7 +5097,7 @@
               </a:defRPr>
             </a:pPr>
             <a:r>
-              <a:t>3. Basic Testbench</a:t>
+              <a:t>2. RTL blocks</a:t>
             </a:r>
           </a:p>
         </p:txBody>
@@ -4766,64 +5139,102 @@
               </a:defRPr>
             </a:pPr>
             <a:r>
-              <a:t>• Loopback: Connect TX output to RX input; send bytes</a:t>
-            </a:r>
-          </a:p>
-          <a:p>
-            <a:pPr>
-              <a:lnSpc>
-                <a:spcPts val="2200"/>
-              </a:lnSpc>
-              <a:spcAft>
-                <a:spcPts val="1000"/>
-              </a:spcAft>
-              <a:defRPr sz="2000" b="0">
-                <a:solidFill>
-                  <a:srgbClr val="333333"/>
-                </a:solidFill>
-                <a:latin typeface="Calibri"/>
-              </a:defRPr>
-            </a:pPr>
-            <a:r>
-              <a:t>      from TX, check they appear on RX.</a:t>
-            </a:r>
-          </a:p>
-          <a:p>
-            <a:pPr>
-              <a:lnSpc>
-                <a:spcPts val="2200"/>
-              </a:lnSpc>
-              <a:spcAft>
-                <a:spcPts val="1000"/>
-              </a:spcAft>
-              <a:defRPr sz="2000" b="0">
-                <a:solidFill>
-                  <a:srgbClr val="333333"/>
-                </a:solidFill>
-                <a:latin typeface="Calibri"/>
-              </a:defRPr>
-            </a:pPr>
-            <a:r>
-              <a:t>• Directed test: Reset release, send 0x55 and 0xAA,</a:t>
-            </a:r>
-          </a:p>
-          <a:p>
-            <a:pPr>
-              <a:lnSpc>
-                <a:spcPts val="2200"/>
-              </a:lnSpc>
-              <a:spcAft>
-                <a:spcPts val="1000"/>
-              </a:spcAft>
-              <a:defRPr sz="2000" b="0">
-                <a:solidFill>
-                  <a:srgbClr val="333333"/>
-                </a:solidFill>
-                <a:latin typeface="Calibri"/>
-              </a:defRPr>
-            </a:pPr>
-            <a:r>
-              <a:t>      wait for `data_valid`, check `data_out`. Implemen…</a:t>
+              <a:t>• baud_gen: `DIVIDER` → `baud_tick` every N clocks;</a:t>
+            </a:r>
+          </a:p>
+          <a:p>
+            <a:pPr>
+              <a:lnSpc>
+                <a:spcPts val="2200"/>
+              </a:lnSpc>
+              <a:spcAft>
+                <a:spcPts val="1000"/>
+              </a:spcAft>
+              <a:defRPr sz="2000" b="0">
+                <a:solidFill>
+                  <a:srgbClr val="333333"/>
+                </a:solidFill>
+                <a:latin typeface="Calibri"/>
+              </a:defRPr>
+            </a:pPr>
+            <a:r>
+              <a:t>      shared by TX and RX.</a:t>
+            </a:r>
+          </a:p>
+          <a:p>
+            <a:pPr>
+              <a:lnSpc>
+                <a:spcPts val="2200"/>
+              </a:lnSpc>
+              <a:spcAft>
+                <a:spcPts val="1000"/>
+              </a:spcAft>
+              <a:defRPr sz="2000" b="0">
+                <a:solidFill>
+                  <a:srgbClr val="333333"/>
+                </a:solidFill>
+                <a:latin typeface="Calibri"/>
+              </a:defRPr>
+            </a:pPr>
+            <a:r>
+              <a:t>• uart_tx: parallel-in / serial-out; start + 8 data</a:t>
+            </a:r>
+          </a:p>
+          <a:p>
+            <a:pPr>
+              <a:lnSpc>
+                <a:spcPts val="2200"/>
+              </a:lnSpc>
+              <a:spcAft>
+                <a:spcPts val="1000"/>
+              </a:spcAft>
+              <a:defRPr sz="2000" b="0">
+                <a:solidFill>
+                  <a:srgbClr val="333333"/>
+                </a:solidFill>
+                <a:latin typeface="Calibri"/>
+              </a:defRPr>
+            </a:pPr>
+            <a:r>
+              <a:t>      (LSB first) + stop; `busy` during frame.</a:t>
+            </a:r>
+          </a:p>
+          <a:p>
+            <a:pPr>
+              <a:lnSpc>
+                <a:spcPts val="2200"/>
+              </a:lnSpc>
+              <a:spcAft>
+                <a:spcPts val="1000"/>
+              </a:spcAft>
+              <a:defRPr sz="2000" b="0">
+                <a:solidFill>
+                  <a:srgbClr val="333333"/>
+                </a:solidFill>
+                <a:latin typeface="Calibri"/>
+              </a:defRPr>
+            </a:pPr>
+            <a:r>
+              <a:t>• uart_rx: start detect, sample per `baud_tick`,</a:t>
+            </a:r>
+          </a:p>
+          <a:p>
+            <a:pPr>
+              <a:lnSpc>
+                <a:spcPts val="2200"/>
+              </a:lnSpc>
+              <a:spcAft>
+                <a:spcPts val="1000"/>
+              </a:spcAft>
+              <a:defRPr sz="2000" b="0">
+                <a:solidFill>
+                  <a:srgbClr val="333333"/>
+                </a:solidFill>
+                <a:latin typeface="Calibri"/>
+              </a:defRPr>
+            </a:pPr>
+            <a:r>
+              <a:t>      `data_valid` + optional `framing_error`.</a:t>
             </a:r>
           </a:p>
         </p:txBody>
@@ -4893,8 +5304,8 @@
         </p:nvSpPr>
         <p:spPr>
           <a:xfrm>
-            <a:off x="548640" y="2743200"/>
-            <a:ext cx="11064240" cy="1371600"/>
+            <a:off x="548640" y="411480"/>
+            <a:ext cx="11064240" cy="777240"/>
           </a:xfrm>
           <a:prstGeom prst="rect">
             <a:avLst/>
@@ -4907,11 +5318,11 @@
           </a:bodyPr>
           <a:lstStyle/>
           <a:p>
-            <a:pPr algn="ctr">
-              <a:lnSpc>
-                <a:spcPts val="2200"/>
-              </a:lnSpc>
-              <a:defRPr sz="3600" b="1">
+            <a:pPr>
+              <a:lnSpc>
+                <a:spcPts val="2200"/>
+              </a:lnSpc>
+              <a:defRPr sz="2800" b="1">
                 <a:solidFill>
                   <a:srgbClr val="1A1A2E"/>
                 </a:solidFill>
@@ -4919,7 +5330,7 @@
               </a:defRPr>
             </a:pPr>
             <a:r>
-              <a:t>Hands-on examples</a:t>
+              <a:t>3. Timing and clocking</a:t>
             </a:r>
           </a:p>
         </p:txBody>
@@ -4927,6 +5338,67 @@
       <p:sp>
         <p:nvSpPr>
           <p:cNvPr id="3" name="TextBox 2"/>
+          <p:cNvSpPr txBox="1"/>
+          <p:nvPr/>
+        </p:nvSpPr>
+        <p:spPr>
+          <a:xfrm>
+            <a:off x="548640" y="1234440"/>
+            <a:ext cx="11064240" cy="4937760"/>
+          </a:xfrm>
+          <a:prstGeom prst="rect">
+            <a:avLst/>
+          </a:prstGeom>
+          <a:noFill/>
+        </p:spPr>
+        <p:txBody>
+          <a:bodyPr wrap="square">
+            <a:noAutofit/>
+          </a:bodyPr>
+          <a:lstStyle/>
+          <a:p>
+            <a:pPr>
+              <a:lnSpc>
+                <a:spcPts val="2200"/>
+              </a:lnSpc>
+              <a:spcAft>
+                <a:spcPts val="1000"/>
+              </a:spcAft>
+              <a:defRPr sz="2000" b="0">
+                <a:solidFill>
+                  <a:srgbClr val="333333"/>
+                </a:solidFill>
+                <a:latin typeface="Calibri"/>
+              </a:defRPr>
+            </a:pPr>
+            <a:r>
+              <a:t>• Single `clk` domain; async `rst_n`; all bit times</a:t>
+            </a:r>
+          </a:p>
+          <a:p>
+            <a:pPr>
+              <a:lnSpc>
+                <a:spcPts val="2200"/>
+              </a:lnSpc>
+              <a:spcAft>
+                <a:spcPts val="1000"/>
+              </a:spcAft>
+              <a:defRPr sz="2000" b="0">
+                <a:solidFill>
+                  <a:srgbClr val="333333"/>
+                </a:solidFill>
+                <a:latin typeface="Calibri"/>
+              </a:defRPr>
+            </a:pPr>
+            <a:r>
+              <a:t>      referenced to `baud_tick`.</a:t>
+            </a:r>
+          </a:p>
+        </p:txBody>
+      </p:sp>
+      <p:sp>
+        <p:nvSpPr>
+          <p:cNvPr id="4" name="TextBox 3"/>
           <p:cNvSpPr txBox="1"/>
           <p:nvPr/>
         </p:nvSpPr>
@@ -4989,8 +5461,8 @@
         </p:nvSpPr>
         <p:spPr>
           <a:xfrm>
-            <a:off x="548640" y="411480"/>
-            <a:ext cx="11064240" cy="777240"/>
+            <a:off x="548640" y="2743200"/>
+            <a:ext cx="11064240" cy="1371600"/>
           </a:xfrm>
           <a:prstGeom prst="rect">
             <a:avLst/>
@@ -5003,11 +5475,11 @@
           </a:bodyPr>
           <a:lstStyle/>
           <a:p>
-            <a:pPr>
-              <a:lnSpc>
-                <a:spcPts val="2200"/>
-              </a:lnSpc>
-              <a:defRPr sz="2800" b="1">
+            <a:pPr algn="ctr">
+              <a:lnSpc>
+                <a:spcPts val="2200"/>
+              </a:lnSpc>
+              <a:defRPr sz="3600" b="1">
                 <a:solidFill>
                   <a:srgbClr val="1A1A2E"/>
                 </a:solidFill>
@@ -5015,7 +5487,7 @@
               </a:defRPr>
             </a:pPr>
             <a:r>
-              <a:t>Module 3 self-check</a:t>
+              <a:t>Verification &amp; testing methods</a:t>
             </a:r>
           </a:p>
         </p:txBody>
@@ -5023,74 +5495,6 @@
       <p:sp>
         <p:nvSpPr>
           <p:cNvPr id="3" name="TextBox 2"/>
-          <p:cNvSpPr txBox="1"/>
-          <p:nvPr/>
-        </p:nvSpPr>
-        <p:spPr>
-          <a:xfrm>
-            <a:off x="548640" y="1051560"/>
-            <a:ext cx="11064240" cy="914400"/>
-          </a:xfrm>
-          <a:prstGeom prst="rect">
-            <a:avLst/>
-          </a:prstGeom>
-          <a:solidFill>
-            <a:srgbClr val="F4F4F4"/>
-          </a:solidFill>
-        </p:spPr>
-        <p:txBody>
-          <a:bodyPr wrap="square">
-            <a:noAutofit/>
-          </a:bodyPr>
-          <a:lstStyle/>
-          <a:p>
-            <a:pPr>
-              <a:lnSpc>
-                <a:spcPts val="2200"/>
-              </a:lnSpc>
-              <a:spcAft>
-                <a:spcPts val="200"/>
-              </a:spcAft>
-              <a:defRPr sz="2000" b="0">
-                <a:solidFill>
-                  <a:srgbClr val="333333"/>
-                </a:solidFill>
-                <a:latin typeface="Consolas"/>
-              </a:defRPr>
-            </a:pPr>
-            <a:r>
-              <a:t>$ ./scripts/module3.sh --check</a:t>
-            </a:r>
-          </a:p>
-        </p:txBody>
-      </p:sp>
-      <p:pic>
-        <p:nvPicPr>
-          <p:cNvPr id="4" name="Picture 3" descr="module3_check.png"/>
-          <p:cNvPicPr>
-            <a:picLocks noChangeAspect="1"/>
-          </p:cNvPicPr>
-          <p:nvPr/>
-        </p:nvPicPr>
-        <p:blipFill>
-          <a:blip r:embed="rId2"/>
-          <a:stretch>
-            <a:fillRect/>
-          </a:stretch>
-        </p:blipFill>
-        <p:spPr>
-          <a:xfrm>
-            <a:off x="548640" y="1965960"/>
-            <a:ext cx="7071358" cy="3977639"/>
-          </a:xfrm>
-          <a:prstGeom prst="rect">
-            <a:avLst/>
-          </a:prstGeom>
-        </p:spPr>
-      </p:pic>
-      <p:sp>
-        <p:nvSpPr>
-          <p:cNvPr id="5" name="TextBox 4"/>
           <p:cNvSpPr txBox="1"/>
           <p:nvPr/>
         </p:nvSpPr>
@@ -5179,21 +5583,45 @@
               </a:defRPr>
             </a:pPr>
             <a:r>
-              <a:t>Example 1: UART baseline</a:t>
-            </a:r>
-          </a:p>
-        </p:txBody>
-      </p:sp>
-      <p:sp>
-        <p:nvSpPr>
-          <p:cNvPr id="3" name="TextBox 2"/>
+              <a:t>Testing and closure flow</a:t>
+            </a:r>
+          </a:p>
+        </p:txBody>
+      </p:sp>
+      <p:pic>
+        <p:nvPicPr>
+          <p:cNvPr id="3" name="Picture 2" descr="testing_methods.png"/>
+          <p:cNvPicPr>
+            <a:picLocks noChangeAspect="1"/>
+          </p:cNvPicPr>
+          <p:nvPr/>
+        </p:nvPicPr>
+        <p:blipFill>
+          <a:blip r:embed="rId2"/>
+          <a:stretch>
+            <a:fillRect/>
+          </a:stretch>
+        </p:blipFill>
+        <p:spPr>
+          <a:xfrm>
+            <a:off x="548640" y="1143000"/>
+            <a:ext cx="8128000" cy="4572000"/>
+          </a:xfrm>
+          <a:prstGeom prst="rect">
+            <a:avLst/>
+          </a:prstGeom>
+        </p:spPr>
+      </p:pic>
+      <p:sp>
+        <p:nvSpPr>
+          <p:cNvPr id="4" name="TextBox 3"/>
           <p:cNvSpPr txBox="1"/>
           <p:nvPr/>
         </p:nvSpPr>
         <p:spPr>
           <a:xfrm>
-            <a:off x="548640" y="1234440"/>
-            <a:ext cx="11064240" cy="4937760"/>
+            <a:off x="548640" y="5897880"/>
+            <a:ext cx="11064240" cy="411480"/>
           </a:xfrm>
           <a:prstGeom prst="rect">
             <a:avLst/>
@@ -5210,101 +5638,22 @@
               <a:lnSpc>
                 <a:spcPts val="2200"/>
               </a:lnSpc>
-              <a:spcAft>
-                <a:spcPts val="1000"/>
-              </a:spcAft>
-              <a:defRPr sz="2000" b="0">
-                <a:solidFill>
-                  <a:srgbClr val="333333"/>
-                </a:solidFill>
-                <a:latin typeface="Calibri"/>
-              </a:defRPr>
-            </a:pPr>
-            <a:r>
-              <a:t>• `dut/`: `uart_tx.v`, `uart_rx.v`, `baud_gen.v`</a:t>
-            </a:r>
-          </a:p>
-          <a:p>
-            <a:pPr>
-              <a:lnSpc>
-                <a:spcPts val="2200"/>
-              </a:lnSpc>
-              <a:spcAft>
-                <a:spcPts val="1000"/>
-              </a:spcAft>
-              <a:defRPr sz="2000" b="0">
-                <a:solidFill>
-                  <a:srgbClr val="333333"/>
-                </a:solidFill>
-                <a:latin typeface="Calibri"/>
-              </a:defRPr>
-            </a:pPr>
-            <a:r>
-              <a:t>• `top_uart_baseline.sv`: Top with loopback; directed</a:t>
-            </a:r>
-          </a:p>
-          <a:p>
-            <a:pPr>
-              <a:lnSpc>
-                <a:spcPts val="2200"/>
-              </a:lnSpc>
-              <a:spcAft>
-                <a:spcPts val="1000"/>
-              </a:spcAft>
-              <a:defRPr sz="2000" b="0">
-                <a:solidFill>
-                  <a:srgbClr val="333333"/>
-                </a:solidFill>
-                <a:latin typeface="Calibri"/>
-              </a:defRPr>
-            </a:pPr>
-            <a:r>
-              <a:t>      stimulus and checks in initial blocks.</a:t>
-            </a:r>
-          </a:p>
-          <a:p>
-            <a:pPr>
-              <a:lnSpc>
-                <a:spcPts val="2200"/>
-              </a:lnSpc>
-              <a:spcAft>
-                <a:spcPts val="1000"/>
-              </a:spcAft>
-              <a:defRPr sz="2000" b="0">
-                <a:solidFill>
-                  <a:srgbClr val="333333"/>
-                </a:solidFill>
-                <a:latin typeface="Calibri"/>
-              </a:defRPr>
-            </a:pPr>
-            <a:r>
-              <a:t>• `sim_main.cpp`: C++ harness (clock, reset);</a:t>
-            </a:r>
-          </a:p>
-          <a:p>
-            <a:pPr>
-              <a:lnSpc>
-                <a:spcPts val="2200"/>
-              </a:lnSpc>
-              <a:spcAft>
-                <a:spcPts val="1000"/>
-              </a:spcAft>
-              <a:defRPr sz="2000" b="0">
-                <a:solidFill>
-                  <a:srgbClr val="333333"/>
-                </a:solidFill>
-                <a:latin typeface="Calibri"/>
-              </a:defRPr>
-            </a:pPr>
-            <a:r>
-              <a:t>      simulation runs until `$finish`.</a:t>
-            </a:r>
-          </a:p>
-        </p:txBody>
-      </p:sp>
-      <p:sp>
-        <p:nvSpPr>
-          <p:cNvPr id="4" name="TextBox 3"/>
+              <a:defRPr sz="1200" b="0">
+                <a:solidFill>
+                  <a:srgbClr val="333333"/>
+                </a:solidFill>
+                <a:latin typeface="Calibri"/>
+              </a:defRPr>
+            </a:pPr>
+            <a:r>
+              <a:t>Module 3: how tests, checks, and metrics close verification goals.</a:t>
+            </a:r>
+          </a:p>
+        </p:txBody>
+      </p:sp>
+      <p:sp>
+        <p:nvSpPr>
+          <p:cNvPr id="5" name="TextBox 4"/>
           <p:cNvSpPr txBox="1"/>
           <p:nvPr/>
         </p:nvSpPr>
@@ -5393,7 +5742,7 @@
               </a:defRPr>
             </a:pPr>
             <a:r>
-              <a:t>Demo: UART baseline</a:t>
+              <a:t>1. Verification goals</a:t>
             </a:r>
           </a:p>
         </p:txBody>
@@ -5406,15 +5755,13 @@
         </p:nvSpPr>
         <p:spPr>
           <a:xfrm>
-            <a:off x="548640" y="1051560"/>
-            <a:ext cx="11064240" cy="914400"/>
+            <a:off x="548640" y="1234440"/>
+            <a:ext cx="11064240" cy="4937760"/>
           </a:xfrm>
           <a:prstGeom prst="rect">
             <a:avLst/>
           </a:prstGeom>
-          <a:solidFill>
-            <a:srgbClr val="F4F4F4"/>
-          </a:solidFill>
+          <a:noFill/>
         </p:spPr>
         <p:txBody>
           <a:bodyPr wrap="square">
@@ -5427,48 +5774,62 @@
                 <a:spcPts val="2200"/>
               </a:lnSpc>
               <a:spcAft>
-                <a:spcPts val="200"/>
-              </a:spcAft>
-              <a:defRPr sz="2000" b="0">
-                <a:solidFill>
-                  <a:srgbClr val="333333"/>
-                </a:solidFill>
-                <a:latin typeface="Consolas"/>
-              </a:defRPr>
-            </a:pPr>
-            <a:r>
-              <a:t>$ ./scripts/module3.sh --run</a:t>
-            </a:r>
-          </a:p>
-        </p:txBody>
-      </p:sp>
-      <p:pic>
-        <p:nvPicPr>
-          <p:cNvPr id="4" name="Picture 3" descr="ex01_uart_baseline.png"/>
-          <p:cNvPicPr>
-            <a:picLocks noChangeAspect="1"/>
-          </p:cNvPicPr>
-          <p:nvPr/>
-        </p:nvPicPr>
-        <p:blipFill>
-          <a:blip r:embed="rId2"/>
-          <a:stretch>
-            <a:fillRect/>
-          </a:stretch>
-        </p:blipFill>
-        <p:spPr>
-          <a:xfrm>
-            <a:off x="548640" y="1965960"/>
-            <a:ext cx="7071358" cy="3977639"/>
-          </a:xfrm>
-          <a:prstGeom prst="rect">
-            <a:avLst/>
-          </a:prstGeom>
-        </p:spPr>
-      </p:pic>
-      <p:sp>
-        <p:nvSpPr>
-          <p:cNvPr id="5" name="TextBox 4"/>
+                <a:spcPts val="1000"/>
+              </a:spcAft>
+              <a:defRPr sz="2000" b="0">
+                <a:solidFill>
+                  <a:srgbClr val="333333"/>
+                </a:solidFill>
+                <a:latin typeface="Calibri"/>
+              </a:defRPr>
+            </a:pPr>
+            <a:r>
+              <a:t>• Prove RTL implements UART 8N1 before UVM (Module 4).</a:t>
+            </a:r>
+          </a:p>
+          <a:p>
+            <a:pPr>
+              <a:lnSpc>
+                <a:spcPts val="2200"/>
+              </a:lnSpc>
+              <a:spcAft>
+                <a:spcPts val="1000"/>
+              </a:spcAft>
+              <a:defRPr sz="2000" b="0">
+                <a:solidFill>
+                  <a:srgbClr val="333333"/>
+                </a:solidFill>
+                <a:latin typeface="Calibri"/>
+              </a:defRPr>
+            </a:pPr>
+            <a:r>
+              <a:t>• Happy-path loopback: bytes sent on TX appear</a:t>
+            </a:r>
+          </a:p>
+          <a:p>
+            <a:pPr>
+              <a:lnSpc>
+                <a:spcPts val="2200"/>
+              </a:lnSpc>
+              <a:spcAft>
+                <a:spcPts val="1000"/>
+              </a:spcAft>
+              <a:defRPr sz="2000" b="0">
+                <a:solidFill>
+                  <a:srgbClr val="333333"/>
+                </a:solidFill>
+                <a:latin typeface="Calibri"/>
+              </a:defRPr>
+            </a:pPr>
+            <a:r>
+              <a:t>      correctly on RX.</a:t>
+            </a:r>
+          </a:p>
+        </p:txBody>
+      </p:sp>
+      <p:sp>
+        <p:nvSpPr>
+          <p:cNvPr id="4" name="TextBox 3"/>
           <p:cNvSpPr txBox="1"/>
           <p:nvPr/>
         </p:nvSpPr>
@@ -5531,8 +5892,8 @@
         </p:nvSpPr>
         <p:spPr>
           <a:xfrm>
-            <a:off x="548640" y="2743200"/>
-            <a:ext cx="11064240" cy="1371600"/>
+            <a:off x="548640" y="411480"/>
+            <a:ext cx="11064240" cy="777240"/>
           </a:xfrm>
           <a:prstGeom prst="rect">
             <a:avLst/>
@@ -5545,11 +5906,11 @@
           </a:bodyPr>
           <a:lstStyle/>
           <a:p>
-            <a:pPr algn="ctr">
-              <a:lnSpc>
-                <a:spcPts val="2200"/>
-              </a:lnSpc>
-              <a:defRPr sz="3600" b="1">
+            <a:pPr>
+              <a:lnSpc>
+                <a:spcPts val="2200"/>
+              </a:lnSpc>
+              <a:defRPr sz="2800" b="1">
                 <a:solidFill>
                   <a:srgbClr val="1A1A2E"/>
                 </a:solidFill>
@@ -5557,7 +5918,7 @@
               </a:defRPr>
             </a:pPr>
             <a:r>
-              <a:t>Practice &amp; assessment</a:t>
+              <a:t>2. Baseline directed test</a:t>
             </a:r>
           </a:p>
         </p:txBody>
@@ -5565,6 +5926,143 @@
       <p:sp>
         <p:nvSpPr>
           <p:cNvPr id="3" name="TextBox 2"/>
+          <p:cNvSpPr txBox="1"/>
+          <p:nvPr/>
+        </p:nvSpPr>
+        <p:spPr>
+          <a:xfrm>
+            <a:off x="548640" y="1234440"/>
+            <a:ext cx="11064240" cy="4937760"/>
+          </a:xfrm>
+          <a:prstGeom prst="rect">
+            <a:avLst/>
+          </a:prstGeom>
+          <a:noFill/>
+        </p:spPr>
+        <p:txBody>
+          <a:bodyPr wrap="square">
+            <a:noAutofit/>
+          </a:bodyPr>
+          <a:lstStyle/>
+          <a:p>
+            <a:pPr>
+              <a:lnSpc>
+                <a:spcPts val="2200"/>
+              </a:lnSpc>
+              <a:spcAft>
+                <a:spcPts val="1000"/>
+              </a:spcAft>
+              <a:defRPr sz="2000" b="0">
+                <a:solidFill>
+                  <a:srgbClr val="333333"/>
+                </a:solidFill>
+                <a:latin typeface="Calibri"/>
+              </a:defRPr>
+            </a:pPr>
+            <a:r>
+              <a:t>• Stimulus: `initial` block — `start`, `data_in`</a:t>
+            </a:r>
+          </a:p>
+          <a:p>
+            <a:pPr>
+              <a:lnSpc>
+                <a:spcPts val="2200"/>
+              </a:lnSpc>
+              <a:spcAft>
+                <a:spcPts val="1000"/>
+              </a:spcAft>
+              <a:defRPr sz="2000" b="0">
+                <a:solidFill>
+                  <a:srgbClr val="333333"/>
+                </a:solidFill>
+                <a:latin typeface="Calibri"/>
+              </a:defRPr>
+            </a:pPr>
+            <a:r>
+              <a:t>      (0x55, 0xAA).</a:t>
+            </a:r>
+          </a:p>
+          <a:p>
+            <a:pPr>
+              <a:lnSpc>
+                <a:spcPts val="2200"/>
+              </a:lnSpc>
+              <a:spcAft>
+                <a:spcPts val="1000"/>
+              </a:spcAft>
+              <a:defRPr sz="2000" b="0">
+                <a:solidFill>
+                  <a:srgbClr val="333333"/>
+                </a:solidFill>
+                <a:latin typeface="Calibri"/>
+              </a:defRPr>
+            </a:pPr>
+            <a:r>
+              <a:t>• Check: `wait(data_valid)`; compare `data_out`;</a:t>
+            </a:r>
+          </a:p>
+          <a:p>
+            <a:pPr>
+              <a:lnSpc>
+                <a:spcPts val="2200"/>
+              </a:lnSpc>
+              <a:spcAft>
+                <a:spcPts val="1000"/>
+              </a:spcAft>
+              <a:defRPr sz="2000" b="0">
+                <a:solidFill>
+                  <a:srgbClr val="333333"/>
+                </a:solidFill>
+                <a:latin typeface="Calibri"/>
+              </a:defRPr>
+            </a:pPr>
+            <a:r>
+              <a:t>      `$error` / `$display`.</a:t>
+            </a:r>
+          </a:p>
+          <a:p>
+            <a:pPr>
+              <a:lnSpc>
+                <a:spcPts val="2200"/>
+              </a:lnSpc>
+              <a:spcAft>
+                <a:spcPts val="1000"/>
+              </a:spcAft>
+              <a:defRPr sz="2000" b="0">
+                <a:solidFill>
+                  <a:srgbClr val="333333"/>
+                </a:solidFill>
+                <a:latin typeface="Calibri"/>
+              </a:defRPr>
+            </a:pPr>
+            <a:r>
+              <a:t>• No UVM: pin wiggling only — fastest way to learn the</a:t>
+            </a:r>
+          </a:p>
+          <a:p>
+            <a:pPr>
+              <a:lnSpc>
+                <a:spcPts val="2200"/>
+              </a:lnSpc>
+              <a:spcAft>
+                <a:spcPts val="1000"/>
+              </a:spcAft>
+              <a:defRPr sz="2000" b="0">
+                <a:solidFill>
+                  <a:srgbClr val="333333"/>
+                </a:solidFill>
+                <a:latin typeface="Calibri"/>
+              </a:defRPr>
+            </a:pPr>
+            <a:r>
+              <a:t>      protocol on real RTL.</a:t>
+            </a:r>
+          </a:p>
+        </p:txBody>
+      </p:sp>
+      <p:sp>
+        <p:nvSpPr>
+          <p:cNvPr id="4" name="TextBox 3"/>
           <p:cNvSpPr txBox="1"/>
           <p:nvPr/>
         </p:nvSpPr>
@@ -5653,7 +6151,7 @@
               </a:defRPr>
             </a:pPr>
             <a:r>
-              <a:t>Exercises</a:t>
+              <a:t>3. Coverage gaps (defer to Module 4)</a:t>
             </a:r>
           </a:p>
         </p:txBody>
@@ -5695,64 +6193,83 @@
               </a:defRPr>
             </a:pPr>
             <a:r>
-              <a:t>• Run uart_baseline</a:t>
-            </a:r>
-          </a:p>
-          <a:p>
-            <a:pPr>
-              <a:lnSpc>
-                <a:spcPts val="2200"/>
-              </a:lnSpc>
-              <a:spcAft>
-                <a:spcPts val="1000"/>
-              </a:spcAft>
-              <a:defRPr sz="2000" b="0">
-                <a:solidFill>
-                  <a:srgbClr val="333333"/>
-                </a:solidFill>
-                <a:latin typeface="Calibri"/>
-              </a:defRPr>
-            </a:pPr>
-            <a:r>
-              <a:t>• Trace one byte</a:t>
-            </a:r>
-          </a:p>
-          <a:p>
-            <a:pPr>
-              <a:lnSpc>
-                <a:spcPts val="2200"/>
-              </a:lnSpc>
-              <a:spcAft>
-                <a:spcPts val="1000"/>
-              </a:spcAft>
-              <a:defRPr sz="2000" b="0">
-                <a:solidFill>
-                  <a:srgbClr val="333333"/>
-                </a:solidFill>
-                <a:latin typeface="Calibri"/>
-              </a:defRPr>
-            </a:pPr>
-            <a:r>
-              <a:t>• Baud and divider</a:t>
-            </a:r>
-          </a:p>
-          <a:p>
-            <a:pPr>
-              <a:lnSpc>
-                <a:spcPts val="2200"/>
-              </a:lnSpc>
-              <a:spcAft>
-                <a:spcPts val="1000"/>
-              </a:spcAft>
-              <a:defRPr sz="2000" b="0">
-                <a:solidFill>
-                  <a:srgbClr val="333333"/>
-                </a:solidFill>
-                <a:latin typeface="Calibri"/>
-              </a:defRPr>
-            </a:pPr>
-            <a:r>
-              <a:t>• Optional: Waveforms</a:t>
+              <a:t>• Random baud, framing errors, `busy` back-to-back,</a:t>
+            </a:r>
+          </a:p>
+          <a:p>
+            <a:pPr>
+              <a:lnSpc>
+                <a:spcPts val="2200"/>
+              </a:lnSpc>
+              <a:spcAft>
+                <a:spcPts val="1000"/>
+              </a:spcAft>
+              <a:defRPr sz="2000" b="0">
+                <a:solidFill>
+                  <a:srgbClr val="333333"/>
+                </a:solidFill>
+                <a:latin typeface="Calibri"/>
+              </a:defRPr>
+            </a:pPr>
+            <a:r>
+              <a:t>      functional coverage.</a:t>
+            </a:r>
+          </a:p>
+          <a:p>
+            <a:pPr>
+              <a:lnSpc>
+                <a:spcPts val="2200"/>
+              </a:lnSpc>
+              <a:spcAft>
+                <a:spcPts val="1000"/>
+              </a:spcAft>
+              <a:defRPr sz="2000" b="0">
+                <a:solidFill>
+                  <a:srgbClr val="333333"/>
+                </a:solidFill>
+                <a:latin typeface="Calibri"/>
+              </a:defRPr>
+            </a:pPr>
+            <a:r>
+              <a:t>• Map checks to</a:t>
+            </a:r>
+          </a:p>
+          <a:p>
+            <a:pPr>
+              <a:lnSpc>
+                <a:spcPts val="2200"/>
+              </a:lnSpc>
+              <a:spcAft>
+                <a:spcPts val="1000"/>
+              </a:spcAft>
+              <a:defRPr sz="2000" b="0">
+                <a:solidFill>
+                  <a:srgbClr val="333333"/>
+                </a:solidFill>
+                <a:latin typeface="Calibri"/>
+              </a:defRPr>
+            </a:pPr>
+            <a:r>
+              <a:t>      [UART_LEARNING_GUIDE.md](UART_LEARNING_GUIDE.md)</a:t>
+            </a:r>
+          </a:p>
+          <a:p>
+            <a:pPr>
+              <a:lnSpc>
+                <a:spcPts val="2200"/>
+              </a:lnSpc>
+              <a:spcAft>
+                <a:spcPts val="1000"/>
+              </a:spcAft>
+              <a:defRPr sz="2000" b="0">
+                <a:solidFill>
+                  <a:srgbClr val="333333"/>
+                </a:solidFill>
+                <a:latin typeface="Calibri"/>
+              </a:defRPr>
+            </a:pPr>
+            <a:r>
+              <a:t>      spec bullets.</a:t>
             </a:r>
           </a:p>
         </p:txBody>
@@ -5822,8 +6339,8 @@
         </p:nvSpPr>
         <p:spPr>
           <a:xfrm>
-            <a:off x="548640" y="411480"/>
-            <a:ext cx="11064240" cy="777240"/>
+            <a:off x="548640" y="2743200"/>
+            <a:ext cx="11064240" cy="1371600"/>
           </a:xfrm>
           <a:prstGeom prst="rect">
             <a:avLst/>
@@ -5836,11 +6353,11 @@
           </a:bodyPr>
           <a:lstStyle/>
           <a:p>
-            <a:pPr>
-              <a:lnSpc>
-                <a:spcPts val="2200"/>
-              </a:lnSpc>
-              <a:defRPr sz="2800" b="1">
+            <a:pPr algn="ctr">
+              <a:lnSpc>
+                <a:spcPts val="2200"/>
+              </a:lnSpc>
+              <a:defRPr sz="3600" b="1">
                 <a:solidFill>
                   <a:srgbClr val="1A1A2E"/>
                 </a:solidFill>
@@ -5848,7 +6365,7 @@
               </a:defRPr>
             </a:pPr>
             <a:r>
-              <a:t>Assessment checklist</a:t>
+              <a:t>Syllabus topics</a:t>
             </a:r>
           </a:p>
         </p:txBody>
@@ -5856,162 +6373,6 @@
       <p:sp>
         <p:nvSpPr>
           <p:cNvPr id="3" name="TextBox 2"/>
-          <p:cNvSpPr txBox="1"/>
-          <p:nvPr/>
-        </p:nvSpPr>
-        <p:spPr>
-          <a:xfrm>
-            <a:off x="548640" y="1234440"/>
-            <a:ext cx="11064240" cy="4937760"/>
-          </a:xfrm>
-          <a:prstGeom prst="rect">
-            <a:avLst/>
-          </a:prstGeom>
-          <a:noFill/>
-        </p:spPr>
-        <p:txBody>
-          <a:bodyPr wrap="square">
-            <a:noAutofit/>
-          </a:bodyPr>
-          <a:lstStyle/>
-          <a:p>
-            <a:pPr>
-              <a:lnSpc>
-                <a:spcPts val="2200"/>
-              </a:lnSpc>
-              <a:spcAft>
-                <a:spcPts val="1000"/>
-              </a:spcAft>
-              <a:defRPr sz="2000" b="0">
-                <a:solidFill>
-                  <a:srgbClr val="333333"/>
-                </a:solidFill>
-                <a:latin typeface="Calibri"/>
-              </a:defRPr>
-            </a:pPr>
-            <a:r>
-              <a:t>• Can describe UART 8N1 (start bit, 8 data LSB first,</a:t>
-            </a:r>
-          </a:p>
-          <a:p>
-            <a:pPr>
-              <a:lnSpc>
-                <a:spcPts val="2200"/>
-              </a:lnSpc>
-              <a:spcAft>
-                <a:spcPts val="1000"/>
-              </a:spcAft>
-              <a:defRPr sz="2000" b="0">
-                <a:solidFill>
-                  <a:srgbClr val="333333"/>
-                </a:solidFill>
-                <a:latin typeface="Calibri"/>
-              </a:defRPr>
-            </a:pPr>
-            <a:r>
-              <a:t>      stop bit) and the role of baud_tick.</a:t>
-            </a:r>
-          </a:p>
-          <a:p>
-            <a:pPr>
-              <a:lnSpc>
-                <a:spcPts val="2200"/>
-              </a:lnSpc>
-              <a:spcAft>
-                <a:spcPts val="1000"/>
-              </a:spcAft>
-              <a:defRPr sz="2000" b="0">
-                <a:solidFill>
-                  <a:srgbClr val="333333"/>
-                </a:solidFill>
-                <a:latin typeface="Calibri"/>
-              </a:defRPr>
-            </a:pPr>
-            <a:r>
-              <a:t>• Can explain the role of uart_tx, uart_rx, and</a:t>
-            </a:r>
-          </a:p>
-          <a:p>
-            <a:pPr>
-              <a:lnSpc>
-                <a:spcPts val="2200"/>
-              </a:lnSpc>
-              <a:spcAft>
-                <a:spcPts val="1000"/>
-              </a:spcAft>
-              <a:defRPr sz="2000" b="0">
-                <a:solidFill>
-                  <a:srgbClr val="333333"/>
-                </a:solidFill>
-                <a:latin typeface="Calibri"/>
-              </a:defRPr>
-            </a:pPr>
-            <a:r>
-              <a:t>      baud_gen in the RTL.</a:t>
-            </a:r>
-          </a:p>
-          <a:p>
-            <a:pPr>
-              <a:lnSpc>
-                <a:spcPts val="2200"/>
-              </a:lnSpc>
-              <a:spcAft>
-                <a:spcPts val="1000"/>
-              </a:spcAft>
-              <a:defRPr sz="2000" b="0">
-                <a:solidFill>
-                  <a:srgbClr val="333333"/>
-                </a:solidFill>
-                <a:latin typeface="Calibri"/>
-              </a:defRPr>
-            </a:pPr>
-            <a:r>
-              <a:t>• Can run uart_baseline and interpret the loopback</a:t>
-            </a:r>
-          </a:p>
-          <a:p>
-            <a:pPr>
-              <a:lnSpc>
-                <a:spcPts val="2200"/>
-              </a:lnSpc>
-              <a:spcAft>
-                <a:spcPts val="1000"/>
-              </a:spcAft>
-              <a:defRPr sz="2000" b="0">
-                <a:solidFill>
-                  <a:srgbClr val="333333"/>
-                </a:solidFill>
-                <a:latin typeface="Calibri"/>
-              </a:defRPr>
-            </a:pPr>
-            <a:r>
-              <a:t>      test result.</a:t>
-            </a:r>
-          </a:p>
-          <a:p>
-            <a:pPr>
-              <a:lnSpc>
-                <a:spcPts val="2200"/>
-              </a:lnSpc>
-              <a:spcAft>
-                <a:spcPts val="1000"/>
-              </a:spcAft>
-              <a:defRPr sz="2000" b="0">
-                <a:solidFill>
-                  <a:srgbClr val="333333"/>
-                </a:solidFill>
-                <a:latin typeface="Calibri"/>
-              </a:defRPr>
-            </a:pPr>
-            <a:r>
-              <a:t>• Ready for Module 4: UART UVM+SV verification.</a:t>
-            </a:r>
-          </a:p>
-        </p:txBody>
-      </p:sp>
-      <p:sp>
-        <p:nvSpPr>
-          <p:cNvPr id="4" name="TextBox 3"/>
           <p:cNvSpPr txBox="1"/>
           <p:nvPr/>
         </p:nvSpPr>
@@ -6371,7 +6732,7 @@
               </a:defRPr>
             </a:pPr>
             <a:r>
-              <a:t>Summary &amp; next steps</a:t>
+              <a:t>1. UART Protocol (8N1) (1/4)</a:t>
             </a:r>
           </a:p>
         </p:txBody>
@@ -6413,83 +6774,216 @@
               </a:defRPr>
             </a:pPr>
             <a:r>
-              <a:t>• Understand the UART protocol (8N1, baud), translate</a:t>
-            </a:r>
-          </a:p>
-          <a:p>
-            <a:pPr>
-              <a:lnSpc>
-                <a:spcPts val="2200"/>
-              </a:lnSpc>
-              <a:spcAft>
-                <a:spcPts val="1000"/>
-              </a:spcAft>
-              <a:defRPr sz="2000" b="0">
-                <a:solidFill>
-                  <a:srgbClr val="333333"/>
-                </a:solidFill>
-                <a:latin typeface="Calibri"/>
-              </a:defRPr>
-            </a:pPr>
-            <a:r>
-              <a:t>      it to RTL (TX, RX, baud gen), and verify with a…</a:t>
-            </a:r>
-          </a:p>
-          <a:p>
-            <a:pPr>
-              <a:lnSpc>
-                <a:spcPts val="2200"/>
-              </a:lnSpc>
-              <a:spcAft>
-                <a:spcPts val="1000"/>
-              </a:spcAft>
-              <a:defRPr sz="2000" b="0">
-                <a:solidFill>
-                  <a:srgbClr val="333333"/>
-                </a:solidFill>
-                <a:latin typeface="Calibri"/>
-              </a:defRPr>
-            </a:pPr>
-            <a:r>
-              <a:t>• Complete module3/CHECKLIST.md</a:t>
-            </a:r>
-          </a:p>
-          <a:p>
-            <a:pPr>
-              <a:lnSpc>
-                <a:spcPts val="2200"/>
-              </a:lnSpc>
-              <a:spcAft>
-                <a:spcPts val="1000"/>
-              </a:spcAft>
-              <a:defRPr sz="2000" b="0">
-                <a:solidFill>
-                  <a:srgbClr val="333333"/>
-                </a:solidFill>
-                <a:latin typeface="Calibri"/>
-              </a:defRPr>
-            </a:pPr>
-            <a:r>
-              <a:t>• Run ./scripts/module3.sh --check</a:t>
-            </a:r>
-          </a:p>
-          <a:p>
-            <a:pPr>
-              <a:lnSpc>
-                <a:spcPts val="2200"/>
-              </a:lnSpc>
-              <a:spcAft>
-                <a:spcPts val="1000"/>
-              </a:spcAft>
-              <a:defRPr sz="2000" b="0">
-                <a:solidFill>
-                  <a:srgbClr val="333333"/>
-                </a:solidFill>
-                <a:latin typeface="Calibri"/>
-              </a:defRPr>
-            </a:pPr>
-            <a:r>
-              <a:t>• Next: UART UVM+SV</a:t>
+              <a:t>• Signals: Serial line (tx/rx), idle high; system</a:t>
+            </a:r>
+          </a:p>
+          <a:p>
+            <a:pPr>
+              <a:lnSpc>
+                <a:spcPts val="2200"/>
+              </a:lnSpc>
+              <a:spcAft>
+                <a:spcPts val="1000"/>
+              </a:spcAft>
+              <a:defRPr sz="2000" b="0">
+                <a:solidFill>
+                  <a:srgbClr val="333333"/>
+                </a:solidFill>
+                <a:latin typeface="Calibri"/>
+              </a:defRPr>
+            </a:pPr>
+            <a:r>
+              <a:t>      clock; baud_tick (one pulse per bit time).</a:t>
+            </a:r>
+          </a:p>
+          <a:p>
+            <a:pPr>
+              <a:lnSpc>
+                <a:spcPts val="2200"/>
+              </a:lnSpc>
+              <a:spcAft>
+                <a:spcPts val="1000"/>
+              </a:spcAft>
+              <a:defRPr sz="2000" b="0">
+                <a:solidFill>
+                  <a:srgbClr val="333333"/>
+                </a:solidFill>
+                <a:latin typeface="Calibri"/>
+              </a:defRPr>
+            </a:pPr>
+            <a:r>
+              <a:t>• Frame: 1 start bit (0), 8 data bits (LSB first), 1</a:t>
+            </a:r>
+          </a:p>
+          <a:p>
+            <a:pPr>
+              <a:lnSpc>
+                <a:spcPts val="2200"/>
+              </a:lnSpc>
+              <a:spcAft>
+                <a:spcPts val="1000"/>
+              </a:spcAft>
+              <a:defRPr sz="2000" b="0">
+                <a:solidFill>
+                  <a:srgbClr val="333333"/>
+                </a:solidFill>
+                <a:latin typeface="Calibri"/>
+              </a:defRPr>
+            </a:pPr>
+            <a:r>
+              <a:t>      stop bit (1).</a:t>
+            </a:r>
+          </a:p>
+          <a:p>
+            <a:pPr>
+              <a:lnSpc>
+                <a:spcPts val="2200"/>
+              </a:lnSpc>
+              <a:spcAft>
+                <a:spcPts val="1000"/>
+              </a:spcAft>
+              <a:defRPr sz="2000" b="0">
+                <a:solidFill>
+                  <a:srgbClr val="333333"/>
+                </a:solidFill>
+                <a:latin typeface="Calibri"/>
+              </a:defRPr>
+            </a:pPr>
+            <a:r>
+              <a:t>• Timing: One bit per baud_tick; baud_tick derived</a:t>
+            </a:r>
+          </a:p>
+          <a:p>
+            <a:pPr>
+              <a:lnSpc>
+                <a:spcPts val="2200"/>
+              </a:lnSpc>
+              <a:spcAft>
+                <a:spcPts val="1000"/>
+              </a:spcAft>
+              <a:defRPr sz="2000" b="0">
+                <a:solidFill>
+                  <a:srgbClr val="333333"/>
+                </a:solidFill>
+                <a:latin typeface="Calibri"/>
+              </a:defRPr>
+            </a:pPr>
+            <a:r>
+              <a:t>      from system clock via a divider (e.g. DIVIDER = cl…</a:t>
+            </a:r>
+          </a:p>
+          <a:p>
+            <a:pPr>
+              <a:lnSpc>
+                <a:spcPts val="2200"/>
+              </a:lnSpc>
+              <a:spcAft>
+                <a:spcPts val="1000"/>
+              </a:spcAft>
+              <a:defRPr sz="2000" b="0">
+                <a:solidFill>
+                  <a:srgbClr val="333333"/>
+                </a:solidFill>
+                <a:latin typeface="Calibri"/>
+              </a:defRPr>
+            </a:pPr>
+            <a:r>
+              <a:t>• Framing: `idle=1` → `start=0` → 8 data bits (LSB</a:t>
+            </a:r>
+          </a:p>
+          <a:p>
+            <a:pPr>
+              <a:lnSpc>
+                <a:spcPts val="2200"/>
+              </a:lnSpc>
+              <a:spcAft>
+                <a:spcPts val="1000"/>
+              </a:spcAft>
+              <a:defRPr sz="2000" b="0">
+                <a:solidFill>
+                  <a:srgbClr val="333333"/>
+                </a:solidFill>
+                <a:latin typeface="Calibri"/>
+              </a:defRPr>
+            </a:pPr>
+            <a:r>
+              <a:t>      first) → `stop=1`.</a:t>
+            </a:r>
+          </a:p>
+          <a:p>
+            <a:pPr>
+              <a:lnSpc>
+                <a:spcPts val="2200"/>
+              </a:lnSpc>
+              <a:spcAft>
+                <a:spcPts val="1000"/>
+              </a:spcAft>
+              <a:defRPr sz="2000" b="0">
+                <a:solidFill>
+                  <a:srgbClr val="333333"/>
+                </a:solidFill>
+                <a:latin typeface="Calibri"/>
+              </a:defRPr>
+            </a:pPr>
+            <a:r>
+              <a:t>• Baud math: `DIVIDER = round(clk_hz / baud)`.</a:t>
+            </a:r>
+          </a:p>
+          <a:p>
+            <a:pPr>
+              <a:lnSpc>
+                <a:spcPts val="2200"/>
+              </a:lnSpc>
+              <a:spcAft>
+                <a:spcPts val="1000"/>
+              </a:spcAft>
+              <a:defRPr sz="2000" b="0">
+                <a:solidFill>
+                  <a:srgbClr val="333333"/>
+                </a:solidFill>
+                <a:latin typeface="Calibri"/>
+              </a:defRPr>
+            </a:pPr>
+            <a:r>
+              <a:t>      Example: 50 MHz clock, 115200 baud → divider ≈ 434.</a:t>
+            </a:r>
+          </a:p>
+          <a:p>
+            <a:pPr>
+              <a:lnSpc>
+                <a:spcPts val="2200"/>
+              </a:lnSpc>
+              <a:spcAft>
+                <a:spcPts val="1000"/>
+              </a:spcAft>
+              <a:defRPr sz="2000" b="0">
+                <a:solidFill>
+                  <a:srgbClr val="333333"/>
+                </a:solidFill>
+                <a:latin typeface="Calibri"/>
+              </a:defRPr>
+            </a:pPr>
+            <a:r>
+              <a:t>• Reset state: Line idles high, TX not busy, RX clears</a:t>
+            </a:r>
+          </a:p>
+          <a:p>
+            <a:pPr>
+              <a:lnSpc>
+                <a:spcPts val="2200"/>
+              </a:lnSpc>
+              <a:spcAft>
+                <a:spcPts val="1000"/>
+              </a:spcAft>
+              <a:defRPr sz="2000" b="0">
+                <a:solidFill>
+                  <a:srgbClr val="333333"/>
+                </a:solidFill>
+                <a:latin typeface="Calibri"/>
+              </a:defRPr>
+            </a:pPr>
+            <a:r>
+              <a:t>      internal shift register, `data_valid` low.</a:t>
             </a:r>
           </a:p>
         </p:txBody>
@@ -6497,6 +6991,1925 @@
       <p:sp>
         <p:nvSpPr>
           <p:cNvPr id="4" name="TextBox 3"/>
+          <p:cNvSpPr txBox="1"/>
+          <p:nvPr/>
+        </p:nvSpPr>
+        <p:spPr>
+          <a:xfrm>
+            <a:off x="548640" y="6355080"/>
+            <a:ext cx="11064240" cy="320040"/>
+          </a:xfrm>
+          <a:prstGeom prst="rect">
+            <a:avLst/>
+          </a:prstGeom>
+          <a:noFill/>
+        </p:spPr>
+        <p:txBody>
+          <a:bodyPr wrap="square">
+            <a:noAutofit/>
+          </a:bodyPr>
+          <a:lstStyle/>
+          <a:p>
+            <a:pPr algn="r">
+              <a:lnSpc>
+                <a:spcPts val="2200"/>
+              </a:lnSpc>
+              <a:defRPr sz="1000" b="0">
+                <a:solidFill>
+                  <a:srgbClr val="666666"/>
+                </a:solidFill>
+                <a:latin typeface="Calibri"/>
+              </a:defRPr>
+            </a:pPr>
+            <a:r>
+              <a:t>learn_uart_spi_i2c / Module 3</a:t>
+            </a:r>
+          </a:p>
+        </p:txBody>
+      </p:sp>
+    </p:spTree>
+  </p:cSld>
+  <p:clrMapOvr>
+    <a:masterClrMapping/>
+  </p:clrMapOvr>
+</p:sld>
+</file>
+
+<file path=ppt/slides/slide21.xml><?xml version="1.0" encoding="utf-8"?>
+<p:sld xmlns:a="http://schemas.openxmlformats.org/drawingml/2006/main" xmlns:p="http://schemas.openxmlformats.org/presentationml/2006/main" xmlns:r="http://schemas.openxmlformats.org/officeDocument/2006/relationships">
+  <p:cSld>
+    <p:spTree>
+      <p:nvGrpSpPr>
+        <p:cNvPr id="1" name=""/>
+        <p:cNvGrpSpPr/>
+        <p:nvPr/>
+      </p:nvGrpSpPr>
+      <p:grpSpPr/>
+      <p:sp>
+        <p:nvSpPr>
+          <p:cNvPr id="2" name="TextBox 1"/>
+          <p:cNvSpPr txBox="1"/>
+          <p:nvPr/>
+        </p:nvSpPr>
+        <p:spPr>
+          <a:xfrm>
+            <a:off x="548640" y="411480"/>
+            <a:ext cx="11064240" cy="777240"/>
+          </a:xfrm>
+          <a:prstGeom prst="rect">
+            <a:avLst/>
+          </a:prstGeom>
+          <a:noFill/>
+        </p:spPr>
+        <p:txBody>
+          <a:bodyPr wrap="square">
+            <a:noAutofit/>
+          </a:bodyPr>
+          <a:lstStyle/>
+          <a:p>
+            <a:pPr>
+              <a:lnSpc>
+                <a:spcPts val="2200"/>
+              </a:lnSpc>
+              <a:defRPr sz="2800" b="1">
+                <a:solidFill>
+                  <a:srgbClr val="1A1A2E"/>
+                </a:solidFill>
+                <a:latin typeface="Calibri"/>
+              </a:defRPr>
+            </a:pPr>
+            <a:r>
+              <a:t>1. UART Protocol (8N1) (2/4)</a:t>
+            </a:r>
+          </a:p>
+        </p:txBody>
+      </p:sp>
+      <p:sp>
+        <p:nvSpPr>
+          <p:cNvPr id="3" name="TextBox 2"/>
+          <p:cNvSpPr txBox="1"/>
+          <p:nvPr/>
+        </p:nvSpPr>
+        <p:spPr>
+          <a:xfrm>
+            <a:off x="548640" y="1234440"/>
+            <a:ext cx="11064240" cy="4937760"/>
+          </a:xfrm>
+          <a:prstGeom prst="rect">
+            <a:avLst/>
+          </a:prstGeom>
+          <a:noFill/>
+        </p:spPr>
+        <p:txBody>
+          <a:bodyPr wrap="square">
+            <a:noAutofit/>
+          </a:bodyPr>
+          <a:lstStyle/>
+          <a:p>
+            <a:pPr>
+              <a:lnSpc>
+                <a:spcPts val="2200"/>
+              </a:lnSpc>
+              <a:spcAft>
+                <a:spcPts val="1000"/>
+              </a:spcAft>
+              <a:defRPr sz="2000" b="0">
+                <a:solidFill>
+                  <a:srgbClr val="333333"/>
+                </a:solidFill>
+                <a:latin typeface="Calibri"/>
+              </a:defRPr>
+            </a:pPr>
+            <a:r>
+              <a:t>• Errors: `framing_error` when stop bit is not high at</a:t>
+            </a:r>
+          </a:p>
+          <a:p>
+            <a:pPr>
+              <a:lnSpc>
+                <a:spcPts val="2200"/>
+              </a:lnSpc>
+              <a:spcAft>
+                <a:spcPts val="1000"/>
+              </a:spcAft>
+              <a:defRPr sz="2000" b="0">
+                <a:solidFill>
+                  <a:srgbClr val="333333"/>
+                </a:solidFill>
+                <a:latin typeface="Calibri"/>
+              </a:defRPr>
+            </a:pPr>
+            <a:r>
+              <a:t>      expected sample; optional `parity_error` if pa…</a:t>
+            </a:r>
+          </a:p>
+          <a:p>
+            <a:pPr>
+              <a:lnSpc>
+                <a:spcPts val="2200"/>
+              </a:lnSpc>
+              <a:spcAft>
+                <a:spcPts val="1000"/>
+              </a:spcAft>
+              <a:defRPr sz="2000" b="0">
+                <a:solidFill>
+                  <a:srgbClr val="333333"/>
+                </a:solidFill>
+                <a:latin typeface="Calibri"/>
+              </a:defRPr>
+            </a:pPr>
+            <a:r>
+              <a:t>• Inputs: `clk`, `rst_n`, `baud_tick`, `start`,</a:t>
+            </a:r>
+          </a:p>
+          <a:p>
+            <a:pPr>
+              <a:lnSpc>
+                <a:spcPts val="2200"/>
+              </a:lnSpc>
+              <a:spcAft>
+                <a:spcPts val="1000"/>
+              </a:spcAft>
+              <a:defRPr sz="2000" b="0">
+                <a:solidFill>
+                  <a:srgbClr val="333333"/>
+                </a:solidFill>
+                <a:latin typeface="Calibri"/>
+              </a:defRPr>
+            </a:pPr>
+            <a:r>
+              <a:t>      `data_in[7:0]`.</a:t>
+            </a:r>
+          </a:p>
+          <a:p>
+            <a:pPr>
+              <a:lnSpc>
+                <a:spcPts val="2200"/>
+              </a:lnSpc>
+              <a:spcAft>
+                <a:spcPts val="1000"/>
+              </a:spcAft>
+              <a:defRPr sz="2000" b="0">
+                <a:solidFill>
+                  <a:srgbClr val="333333"/>
+                </a:solidFill>
+                <a:latin typeface="Calibri"/>
+              </a:defRPr>
+            </a:pPr>
+            <a:r>
+              <a:t>• Outputs: `tx`, `busy`.</a:t>
+            </a:r>
+          </a:p>
+          <a:p>
+            <a:pPr>
+              <a:lnSpc>
+                <a:spcPts val="2200"/>
+              </a:lnSpc>
+              <a:spcAft>
+                <a:spcPts val="1000"/>
+              </a:spcAft>
+              <a:defRPr sz="2000" b="0">
+                <a:solidFill>
+                  <a:srgbClr val="333333"/>
+                </a:solidFill>
+                <a:latin typeface="Calibri"/>
+              </a:defRPr>
+            </a:pPr>
+            <a:r>
+              <a:t>• Behavior: On `start`, latch `data_in`, drive start</a:t>
+            </a:r>
+          </a:p>
+          <a:p>
+            <a:pPr>
+              <a:lnSpc>
+                <a:spcPts val="2200"/>
+              </a:lnSpc>
+              <a:spcAft>
+                <a:spcPts val="1000"/>
+              </a:spcAft>
+              <a:defRPr sz="2000" b="0">
+                <a:solidFill>
+                  <a:srgbClr val="333333"/>
+                </a:solidFill>
+                <a:latin typeface="Calibri"/>
+              </a:defRPr>
+            </a:pPr>
+            <a:r>
+              <a:t>      bit low, then shift out bits [0:7] each `baud_ti…</a:t>
+            </a:r>
+          </a:p>
+          <a:p>
+            <a:pPr>
+              <a:lnSpc>
+                <a:spcPts val="2200"/>
+              </a:lnSpc>
+              <a:spcAft>
+                <a:spcPts val="1000"/>
+              </a:spcAft>
+              <a:defRPr sz="2000" b="0">
+                <a:solidFill>
+                  <a:srgbClr val="333333"/>
+                </a:solidFill>
+                <a:latin typeface="Calibri"/>
+              </a:defRPr>
+            </a:pPr>
+            <a:r>
+              <a:t>• Edge cases: Ignore `start` while `busy` (or queue it</a:t>
+            </a:r>
+          </a:p>
+          <a:p>
+            <a:pPr>
+              <a:lnSpc>
+                <a:spcPts val="2200"/>
+              </a:lnSpc>
+              <a:spcAft>
+                <a:spcPts val="1000"/>
+              </a:spcAft>
+              <a:defRPr sz="2000" b="0">
+                <a:solidFill>
+                  <a:srgbClr val="333333"/>
+                </a:solidFill>
+                <a:latin typeface="Calibri"/>
+              </a:defRPr>
+            </a:pPr>
+            <a:r>
+              <a:t>      in a FIFO if you extend the design).</a:t>
+            </a:r>
+          </a:p>
+          <a:p>
+            <a:pPr>
+              <a:lnSpc>
+                <a:spcPts val="2200"/>
+              </a:lnSpc>
+              <a:spcAft>
+                <a:spcPts val="1000"/>
+              </a:spcAft>
+              <a:defRPr sz="2000" b="0">
+                <a:solidFill>
+                  <a:srgbClr val="333333"/>
+                </a:solidFill>
+                <a:latin typeface="Calibri"/>
+              </a:defRPr>
+            </a:pPr>
+            <a:r>
+              <a:t>• Inputs: `clk`, `rst_n`, `baud_tick`, `rx`.</a:t>
+            </a:r>
+          </a:p>
+        </p:txBody>
+      </p:sp>
+      <p:sp>
+        <p:nvSpPr>
+          <p:cNvPr id="4" name="TextBox 3"/>
+          <p:cNvSpPr txBox="1"/>
+          <p:nvPr/>
+        </p:nvSpPr>
+        <p:spPr>
+          <a:xfrm>
+            <a:off x="548640" y="6355080"/>
+            <a:ext cx="11064240" cy="320040"/>
+          </a:xfrm>
+          <a:prstGeom prst="rect">
+            <a:avLst/>
+          </a:prstGeom>
+          <a:noFill/>
+        </p:spPr>
+        <p:txBody>
+          <a:bodyPr wrap="square">
+            <a:noAutofit/>
+          </a:bodyPr>
+          <a:lstStyle/>
+          <a:p>
+            <a:pPr algn="r">
+              <a:lnSpc>
+                <a:spcPts val="2200"/>
+              </a:lnSpc>
+              <a:defRPr sz="1000" b="0">
+                <a:solidFill>
+                  <a:srgbClr val="666666"/>
+                </a:solidFill>
+                <a:latin typeface="Calibri"/>
+              </a:defRPr>
+            </a:pPr>
+            <a:r>
+              <a:t>learn_uart_spi_i2c / Module 3</a:t>
+            </a:r>
+          </a:p>
+        </p:txBody>
+      </p:sp>
+    </p:spTree>
+  </p:cSld>
+  <p:clrMapOvr>
+    <a:masterClrMapping/>
+  </p:clrMapOvr>
+</p:sld>
+</file>
+
+<file path=ppt/slides/slide22.xml><?xml version="1.0" encoding="utf-8"?>
+<p:sld xmlns:a="http://schemas.openxmlformats.org/drawingml/2006/main" xmlns:p="http://schemas.openxmlformats.org/presentationml/2006/main" xmlns:r="http://schemas.openxmlformats.org/officeDocument/2006/relationships">
+  <p:cSld>
+    <p:spTree>
+      <p:nvGrpSpPr>
+        <p:cNvPr id="1" name=""/>
+        <p:cNvGrpSpPr/>
+        <p:nvPr/>
+      </p:nvGrpSpPr>
+      <p:grpSpPr/>
+      <p:sp>
+        <p:nvSpPr>
+          <p:cNvPr id="2" name="TextBox 1"/>
+          <p:cNvSpPr txBox="1"/>
+          <p:nvPr/>
+        </p:nvSpPr>
+        <p:spPr>
+          <a:xfrm>
+            <a:off x="548640" y="411480"/>
+            <a:ext cx="11064240" cy="777240"/>
+          </a:xfrm>
+          <a:prstGeom prst="rect">
+            <a:avLst/>
+          </a:prstGeom>
+          <a:noFill/>
+        </p:spPr>
+        <p:txBody>
+          <a:bodyPr wrap="square">
+            <a:noAutofit/>
+          </a:bodyPr>
+          <a:lstStyle/>
+          <a:p>
+            <a:pPr>
+              <a:lnSpc>
+                <a:spcPts val="2200"/>
+              </a:lnSpc>
+              <a:defRPr sz="2800" b="1">
+                <a:solidFill>
+                  <a:srgbClr val="1A1A2E"/>
+                </a:solidFill>
+                <a:latin typeface="Calibri"/>
+              </a:defRPr>
+            </a:pPr>
+            <a:r>
+              <a:t>1. UART Protocol (8N1) (3/4)</a:t>
+            </a:r>
+          </a:p>
+        </p:txBody>
+      </p:sp>
+      <p:sp>
+        <p:nvSpPr>
+          <p:cNvPr id="3" name="TextBox 2"/>
+          <p:cNvSpPr txBox="1"/>
+          <p:nvPr/>
+        </p:nvSpPr>
+        <p:spPr>
+          <a:xfrm>
+            <a:off x="548640" y="1234440"/>
+            <a:ext cx="11064240" cy="4937760"/>
+          </a:xfrm>
+          <a:prstGeom prst="rect">
+            <a:avLst/>
+          </a:prstGeom>
+          <a:noFill/>
+        </p:spPr>
+        <p:txBody>
+          <a:bodyPr wrap="square">
+            <a:noAutofit/>
+          </a:bodyPr>
+          <a:lstStyle/>
+          <a:p>
+            <a:pPr>
+              <a:lnSpc>
+                <a:spcPts val="2200"/>
+              </a:lnSpc>
+              <a:spcAft>
+                <a:spcPts val="1000"/>
+              </a:spcAft>
+              <a:defRPr sz="2000" b="0">
+                <a:solidFill>
+                  <a:srgbClr val="333333"/>
+                </a:solidFill>
+                <a:latin typeface="Calibri"/>
+              </a:defRPr>
+            </a:pPr>
+            <a:r>
+              <a:t>• Outputs: `data_out[7:0]`, `data_valid` (pulse),</a:t>
+            </a:r>
+          </a:p>
+          <a:p>
+            <a:pPr>
+              <a:lnSpc>
+                <a:spcPts val="2200"/>
+              </a:lnSpc>
+              <a:spcAft>
+                <a:spcPts val="1000"/>
+              </a:spcAft>
+              <a:defRPr sz="2000" b="0">
+                <a:solidFill>
+                  <a:srgbClr val="333333"/>
+                </a:solidFill>
+                <a:latin typeface="Calibri"/>
+              </a:defRPr>
+            </a:pPr>
+            <a:r>
+              <a:t>      `framing_error`.</a:t>
+            </a:r>
+          </a:p>
+          <a:p>
+            <a:pPr>
+              <a:lnSpc>
+                <a:spcPts val="2200"/>
+              </a:lnSpc>
+              <a:spcAft>
+                <a:spcPts val="1000"/>
+              </a:spcAft>
+              <a:defRPr sz="2000" b="0">
+                <a:solidFill>
+                  <a:srgbClr val="333333"/>
+                </a:solidFill>
+                <a:latin typeface="Calibri"/>
+              </a:defRPr>
+            </a:pPr>
+            <a:r>
+              <a:t>• Robustness options: Add metastability sync on `rx`;</a:t>
+            </a:r>
+          </a:p>
+          <a:p>
+            <a:pPr>
+              <a:lnSpc>
+                <a:spcPts val="2200"/>
+              </a:lnSpc>
+              <a:spcAft>
+                <a:spcPts val="1000"/>
+              </a:spcAft>
+              <a:defRPr sz="2000" b="0">
+                <a:solidFill>
+                  <a:srgbClr val="333333"/>
+                </a:solidFill>
+                <a:latin typeface="Calibri"/>
+              </a:defRPr>
+            </a:pPr>
+            <a:r>
+              <a:t>      add oversampling + majority vote; add `rx_ready…</a:t>
+            </a:r>
+          </a:p>
+          <a:p>
+            <a:pPr>
+              <a:lnSpc>
+                <a:spcPts val="2200"/>
+              </a:lnSpc>
+              <a:spcAft>
+                <a:spcPts val="1000"/>
+              </a:spcAft>
+              <a:defRPr sz="2000" b="0">
+                <a:solidFill>
+                  <a:srgbClr val="333333"/>
+                </a:solidFill>
+                <a:latin typeface="Calibri"/>
+              </a:defRPr>
+            </a:pPr>
+            <a:r>
+              <a:t>• Inputs: `clk`, `rst_n`, `divisor` (constant</a:t>
+            </a:r>
+          </a:p>
+          <a:p>
+            <a:pPr>
+              <a:lnSpc>
+                <a:spcPts val="2200"/>
+              </a:lnSpc>
+              <a:spcAft>
+                <a:spcPts val="1000"/>
+              </a:spcAft>
+              <a:defRPr sz="2000" b="0">
+                <a:solidFill>
+                  <a:srgbClr val="333333"/>
+                </a:solidFill>
+                <a:latin typeface="Calibri"/>
+              </a:defRPr>
+            </a:pPr>
+            <a:r>
+              <a:t>      parameter in the baseline).</a:t>
+            </a:r>
+          </a:p>
+          <a:p>
+            <a:pPr>
+              <a:lnSpc>
+                <a:spcPts val="2200"/>
+              </a:lnSpc>
+              <a:spcAft>
+                <a:spcPts val="1000"/>
+              </a:spcAft>
+              <a:defRPr sz="2000" b="0">
+                <a:solidFill>
+                  <a:srgbClr val="333333"/>
+                </a:solidFill>
+                <a:latin typeface="Calibri"/>
+              </a:defRPr>
+            </a:pPr>
+            <a:r>
+              <a:t>• Output: `baud_tick` high for one cycle every</a:t>
+            </a:r>
+          </a:p>
+          <a:p>
+            <a:pPr>
+              <a:lnSpc>
+                <a:spcPts val="2200"/>
+              </a:lnSpc>
+              <a:spcAft>
+                <a:spcPts val="1000"/>
+              </a:spcAft>
+              <a:defRPr sz="2000" b="0">
+                <a:solidFill>
+                  <a:srgbClr val="333333"/>
+                </a:solidFill>
+                <a:latin typeface="Calibri"/>
+              </a:defRPr>
+            </a:pPr>
+            <a:r>
+              <a:t>      `divisor` clocks.</a:t>
+            </a:r>
+          </a:p>
+          <a:p>
+            <a:pPr>
+              <a:lnSpc>
+                <a:spcPts val="2200"/>
+              </a:lnSpc>
+              <a:spcAft>
+                <a:spcPts val="1000"/>
+              </a:spcAft>
+              <a:defRPr sz="2000" b="0">
+                <a:solidFill>
+                  <a:srgbClr val="333333"/>
+                </a:solidFill>
+                <a:latin typeface="Calibri"/>
+              </a:defRPr>
+            </a:pPr>
+            <a:r>
+              <a:t>• For synthesis, keep the counter simple (`divisor-1`</a:t>
+            </a:r>
+          </a:p>
+          <a:p>
+            <a:pPr>
+              <a:lnSpc>
+                <a:spcPts val="2200"/>
+              </a:lnSpc>
+              <a:spcAft>
+                <a:spcPts val="1000"/>
+              </a:spcAft>
+              <a:defRPr sz="2000" b="0">
+                <a:solidFill>
+                  <a:srgbClr val="333333"/>
+                </a:solidFill>
+                <a:latin typeface="Calibri"/>
+              </a:defRPr>
+            </a:pPr>
+            <a:r>
+              <a:t>      down-counter or up-counter compare). For sim, y…</a:t>
+            </a:r>
+          </a:p>
+          <a:p>
+            <a:pPr>
+              <a:lnSpc>
+                <a:spcPts val="2200"/>
+              </a:lnSpc>
+              <a:spcAft>
+                <a:spcPts val="1000"/>
+              </a:spcAft>
+              <a:defRPr sz="2000" b="0">
+                <a:solidFill>
+                  <a:srgbClr val="333333"/>
+                </a:solidFill>
+                <a:latin typeface="Calibri"/>
+              </a:defRPr>
+            </a:pPr>
+            <a:r>
+              <a:t>• Data bits: 5–9 data bits are common.</a:t>
+            </a:r>
+          </a:p>
+        </p:txBody>
+      </p:sp>
+      <p:sp>
+        <p:nvSpPr>
+          <p:cNvPr id="4" name="TextBox 3"/>
+          <p:cNvSpPr txBox="1"/>
+          <p:nvPr/>
+        </p:nvSpPr>
+        <p:spPr>
+          <a:xfrm>
+            <a:off x="548640" y="6355080"/>
+            <a:ext cx="11064240" cy="320040"/>
+          </a:xfrm>
+          <a:prstGeom prst="rect">
+            <a:avLst/>
+          </a:prstGeom>
+          <a:noFill/>
+        </p:spPr>
+        <p:txBody>
+          <a:bodyPr wrap="square">
+            <a:noAutofit/>
+          </a:bodyPr>
+          <a:lstStyle/>
+          <a:p>
+            <a:pPr algn="r">
+              <a:lnSpc>
+                <a:spcPts val="2200"/>
+              </a:lnSpc>
+              <a:defRPr sz="1000" b="0">
+                <a:solidFill>
+                  <a:srgbClr val="666666"/>
+                </a:solidFill>
+                <a:latin typeface="Calibri"/>
+              </a:defRPr>
+            </a:pPr>
+            <a:r>
+              <a:t>learn_uart_spi_i2c / Module 3</a:t>
+            </a:r>
+          </a:p>
+        </p:txBody>
+      </p:sp>
+    </p:spTree>
+  </p:cSld>
+  <p:clrMapOvr>
+    <a:masterClrMapping/>
+  </p:clrMapOvr>
+</p:sld>
+</file>
+
+<file path=ppt/slides/slide23.xml><?xml version="1.0" encoding="utf-8"?>
+<p:sld xmlns:a="http://schemas.openxmlformats.org/drawingml/2006/main" xmlns:p="http://schemas.openxmlformats.org/presentationml/2006/main" xmlns:r="http://schemas.openxmlformats.org/officeDocument/2006/relationships">
+  <p:cSld>
+    <p:spTree>
+      <p:nvGrpSpPr>
+        <p:cNvPr id="1" name=""/>
+        <p:cNvGrpSpPr/>
+        <p:nvPr/>
+      </p:nvGrpSpPr>
+      <p:grpSpPr/>
+      <p:sp>
+        <p:nvSpPr>
+          <p:cNvPr id="2" name="TextBox 1"/>
+          <p:cNvSpPr txBox="1"/>
+          <p:nvPr/>
+        </p:nvSpPr>
+        <p:spPr>
+          <a:xfrm>
+            <a:off x="548640" y="411480"/>
+            <a:ext cx="11064240" cy="777240"/>
+          </a:xfrm>
+          <a:prstGeom prst="rect">
+            <a:avLst/>
+          </a:prstGeom>
+          <a:noFill/>
+        </p:spPr>
+        <p:txBody>
+          <a:bodyPr wrap="square">
+            <a:noAutofit/>
+          </a:bodyPr>
+          <a:lstStyle/>
+          <a:p>
+            <a:pPr>
+              <a:lnSpc>
+                <a:spcPts val="2200"/>
+              </a:lnSpc>
+              <a:defRPr sz="2800" b="1">
+                <a:solidFill>
+                  <a:srgbClr val="1A1A2E"/>
+                </a:solidFill>
+                <a:latin typeface="Calibri"/>
+              </a:defRPr>
+            </a:pPr>
+            <a:r>
+              <a:t>1. UART Protocol (8N1) (4/4)</a:t>
+            </a:r>
+          </a:p>
+        </p:txBody>
+      </p:sp>
+      <p:sp>
+        <p:nvSpPr>
+          <p:cNvPr id="3" name="TextBox 2"/>
+          <p:cNvSpPr txBox="1"/>
+          <p:nvPr/>
+        </p:nvSpPr>
+        <p:spPr>
+          <a:xfrm>
+            <a:off x="548640" y="1234440"/>
+            <a:ext cx="11064240" cy="4937760"/>
+          </a:xfrm>
+          <a:prstGeom prst="rect">
+            <a:avLst/>
+          </a:prstGeom>
+          <a:noFill/>
+        </p:spPr>
+        <p:txBody>
+          <a:bodyPr wrap="square">
+            <a:noAutofit/>
+          </a:bodyPr>
+          <a:lstStyle/>
+          <a:p>
+            <a:pPr>
+              <a:lnSpc>
+                <a:spcPts val="2200"/>
+              </a:lnSpc>
+              <a:spcAft>
+                <a:spcPts val="1000"/>
+              </a:spcAft>
+              <a:defRPr sz="2000" b="0">
+                <a:solidFill>
+                  <a:srgbClr val="333333"/>
+                </a:solidFill>
+                <a:latin typeface="Calibri"/>
+              </a:defRPr>
+            </a:pPr>
+            <a:r>
+              <a:t>• Parity: Even/odd/mark/space; adds a parity bit</a:t>
+            </a:r>
+          </a:p>
+          <a:p>
+            <a:pPr>
+              <a:lnSpc>
+                <a:spcPts val="2200"/>
+              </a:lnSpc>
+              <a:spcAft>
+                <a:spcPts val="1000"/>
+              </a:spcAft>
+              <a:defRPr sz="2000" b="0">
+                <a:solidFill>
+                  <a:srgbClr val="333333"/>
+                </a:solidFill>
+                <a:latin typeface="Calibri"/>
+              </a:defRPr>
+            </a:pPr>
+            <a:r>
+              <a:t>      before stop.</a:t>
+            </a:r>
+          </a:p>
+          <a:p>
+            <a:pPr>
+              <a:lnSpc>
+                <a:spcPts val="2200"/>
+              </a:lnSpc>
+              <a:spcAft>
+                <a:spcPts val="1000"/>
+              </a:spcAft>
+              <a:defRPr sz="2000" b="0">
+                <a:solidFill>
+                  <a:srgbClr val="333333"/>
+                </a:solidFill>
+                <a:latin typeface="Calibri"/>
+              </a:defRPr>
+            </a:pPr>
+            <a:r>
+              <a:t>• Stop bits: 1 or 2 stop bits.</a:t>
+            </a:r>
+          </a:p>
+          <a:p>
+            <a:pPr>
+              <a:lnSpc>
+                <a:spcPts val="2200"/>
+              </a:lnSpc>
+              <a:spcAft>
+                <a:spcPts val="1000"/>
+              </a:spcAft>
+              <a:defRPr sz="2000" b="0">
+                <a:solidFill>
+                  <a:srgbClr val="333333"/>
+                </a:solidFill>
+                <a:latin typeface="Calibri"/>
+              </a:defRPr>
+            </a:pPr>
+            <a:r>
+              <a:t>• Flow control: RTS/CTS hardware pins (outside the</a:t>
+            </a:r>
+          </a:p>
+          <a:p>
+            <a:pPr>
+              <a:lnSpc>
+                <a:spcPts val="2200"/>
+              </a:lnSpc>
+              <a:spcAft>
+                <a:spcPts val="1000"/>
+              </a:spcAft>
+              <a:defRPr sz="2000" b="0">
+                <a:solidFill>
+                  <a:srgbClr val="333333"/>
+                </a:solidFill>
+                <a:latin typeface="Calibri"/>
+              </a:defRPr>
+            </a:pPr>
+            <a:r>
+              <a:t>      serial line) to throttle traffic.</a:t>
+            </a:r>
+          </a:p>
+          <a:p>
+            <a:pPr>
+              <a:lnSpc>
+                <a:spcPts val="2200"/>
+              </a:lnSpc>
+              <a:spcAft>
+                <a:spcPts val="1000"/>
+              </a:spcAft>
+              <a:defRPr sz="2000" b="0">
+                <a:solidFill>
+                  <a:srgbClr val="333333"/>
+                </a:solidFill>
+                <a:latin typeface="Calibri"/>
+              </a:defRPr>
+            </a:pPr>
+            <a:r>
+              <a:t>• The baseline RTL assumes 8N1 with no parity and no</a:t>
+            </a:r>
+          </a:p>
+          <a:p>
+            <a:pPr>
+              <a:lnSpc>
+                <a:spcPts val="2200"/>
+              </a:lnSpc>
+              <a:spcAft>
+                <a:spcPts val="1000"/>
+              </a:spcAft>
+              <a:defRPr sz="2000" b="0">
+                <a:solidFill>
+                  <a:srgbClr val="333333"/>
+                </a:solidFill>
+                <a:latin typeface="Calibri"/>
+              </a:defRPr>
+            </a:pPr>
+            <a:r>
+              <a:t>      flow control.</a:t>
+            </a:r>
+          </a:p>
+        </p:txBody>
+      </p:sp>
+      <p:sp>
+        <p:nvSpPr>
+          <p:cNvPr id="4" name="TextBox 3"/>
+          <p:cNvSpPr txBox="1"/>
+          <p:nvPr/>
+        </p:nvSpPr>
+        <p:spPr>
+          <a:xfrm>
+            <a:off x="548640" y="6355080"/>
+            <a:ext cx="11064240" cy="320040"/>
+          </a:xfrm>
+          <a:prstGeom prst="rect">
+            <a:avLst/>
+          </a:prstGeom>
+          <a:noFill/>
+        </p:spPr>
+        <p:txBody>
+          <a:bodyPr wrap="square">
+            <a:noAutofit/>
+          </a:bodyPr>
+          <a:lstStyle/>
+          <a:p>
+            <a:pPr algn="r">
+              <a:lnSpc>
+                <a:spcPts val="2200"/>
+              </a:lnSpc>
+              <a:defRPr sz="1000" b="0">
+                <a:solidFill>
+                  <a:srgbClr val="666666"/>
+                </a:solidFill>
+                <a:latin typeface="Calibri"/>
+              </a:defRPr>
+            </a:pPr>
+            <a:r>
+              <a:t>learn_uart_spi_i2c / Module 3</a:t>
+            </a:r>
+          </a:p>
+        </p:txBody>
+      </p:sp>
+    </p:spTree>
+  </p:cSld>
+  <p:clrMapOvr>
+    <a:masterClrMapping/>
+  </p:clrMapOvr>
+</p:sld>
+</file>
+
+<file path=ppt/slides/slide24.xml><?xml version="1.0" encoding="utf-8"?>
+<p:sld xmlns:a="http://schemas.openxmlformats.org/drawingml/2006/main" xmlns:p="http://schemas.openxmlformats.org/presentationml/2006/main" xmlns:r="http://schemas.openxmlformats.org/officeDocument/2006/relationships">
+  <p:cSld>
+    <p:spTree>
+      <p:nvGrpSpPr>
+        <p:cNvPr id="1" name=""/>
+        <p:cNvGrpSpPr/>
+        <p:nvPr/>
+      </p:nvGrpSpPr>
+      <p:grpSpPr/>
+      <p:sp>
+        <p:nvSpPr>
+          <p:cNvPr id="2" name="TextBox 1"/>
+          <p:cNvSpPr txBox="1"/>
+          <p:nvPr/>
+        </p:nvSpPr>
+        <p:spPr>
+          <a:xfrm>
+            <a:off x="548640" y="411480"/>
+            <a:ext cx="11064240" cy="777240"/>
+          </a:xfrm>
+          <a:prstGeom prst="rect">
+            <a:avLst/>
+          </a:prstGeom>
+          <a:noFill/>
+        </p:spPr>
+        <p:txBody>
+          <a:bodyPr wrap="square">
+            <a:noAutofit/>
+          </a:bodyPr>
+          <a:lstStyle/>
+          <a:p>
+            <a:pPr>
+              <a:lnSpc>
+                <a:spcPts val="2200"/>
+              </a:lnSpc>
+              <a:defRPr sz="2800" b="1">
+                <a:solidFill>
+                  <a:srgbClr val="1A1A2E"/>
+                </a:solidFill>
+                <a:latin typeface="Calibri"/>
+              </a:defRPr>
+            </a:pPr>
+            <a:r>
+              <a:t>2. Hands-on testbench (uart_baseline)</a:t>
+            </a:r>
+          </a:p>
+        </p:txBody>
+      </p:sp>
+      <p:sp>
+        <p:nvSpPr>
+          <p:cNvPr id="3" name="TextBox 2"/>
+          <p:cNvSpPr txBox="1"/>
+          <p:nvPr/>
+        </p:nvSpPr>
+        <p:spPr>
+          <a:xfrm>
+            <a:off x="548640" y="1234440"/>
+            <a:ext cx="11064240" cy="4937760"/>
+          </a:xfrm>
+          <a:prstGeom prst="rect">
+            <a:avLst/>
+          </a:prstGeom>
+          <a:noFill/>
+        </p:spPr>
+        <p:txBody>
+          <a:bodyPr wrap="square">
+            <a:noAutofit/>
+          </a:bodyPr>
+          <a:lstStyle/>
+          <a:p>
+            <a:pPr>
+              <a:lnSpc>
+                <a:spcPts val="2200"/>
+              </a:lnSpc>
+              <a:spcAft>
+                <a:spcPts val="1000"/>
+              </a:spcAft>
+              <a:defRPr sz="2000" b="0">
+                <a:solidFill>
+                  <a:srgbClr val="333333"/>
+                </a:solidFill>
+                <a:latin typeface="Calibri"/>
+              </a:defRPr>
+            </a:pPr>
+            <a:r>
+              <a:t>• Loopback: Connect TX output to RX input; send bytes</a:t>
+            </a:r>
+          </a:p>
+          <a:p>
+            <a:pPr>
+              <a:lnSpc>
+                <a:spcPts val="2200"/>
+              </a:lnSpc>
+              <a:spcAft>
+                <a:spcPts val="1000"/>
+              </a:spcAft>
+              <a:defRPr sz="2000" b="0">
+                <a:solidFill>
+                  <a:srgbClr val="333333"/>
+                </a:solidFill>
+                <a:latin typeface="Calibri"/>
+              </a:defRPr>
+            </a:pPr>
+            <a:r>
+              <a:t>      from TX, check they appear on RX.</a:t>
+            </a:r>
+          </a:p>
+          <a:p>
+            <a:pPr>
+              <a:lnSpc>
+                <a:spcPts val="2200"/>
+              </a:lnSpc>
+              <a:spcAft>
+                <a:spcPts val="1000"/>
+              </a:spcAft>
+              <a:defRPr sz="2000" b="0">
+                <a:solidFill>
+                  <a:srgbClr val="333333"/>
+                </a:solidFill>
+                <a:latin typeface="Calibri"/>
+              </a:defRPr>
+            </a:pPr>
+            <a:r>
+              <a:t>• Directed test: Reset release, send 0x55 and 0xAA,</a:t>
+            </a:r>
+          </a:p>
+          <a:p>
+            <a:pPr>
+              <a:lnSpc>
+                <a:spcPts val="2200"/>
+              </a:lnSpc>
+              <a:spcAft>
+                <a:spcPts val="1000"/>
+              </a:spcAft>
+              <a:defRPr sz="2000" b="0">
+                <a:solidFill>
+                  <a:srgbClr val="333333"/>
+                </a:solidFill>
+                <a:latin typeface="Calibri"/>
+              </a:defRPr>
+            </a:pPr>
+            <a:r>
+              <a:t>      wait for `data_valid`, check `data_out`. Implemen…</a:t>
+            </a:r>
+          </a:p>
+          <a:p>
+            <a:pPr>
+              <a:lnSpc>
+                <a:spcPts val="2200"/>
+              </a:lnSpc>
+              <a:spcAft>
+                <a:spcPts val="1000"/>
+              </a:spcAft>
+              <a:defRPr sz="2000" b="0">
+                <a:solidFill>
+                  <a:srgbClr val="333333"/>
+                </a:solidFill>
+                <a:latin typeface="Calibri"/>
+              </a:defRPr>
+            </a:pPr>
+            <a:r>
+              <a:t>• Self-check flow: `wait(rst_n)` → pulse</a:t>
+            </a:r>
+          </a:p>
+          <a:p>
+            <a:pPr>
+              <a:lnSpc>
+                <a:spcPts val="2200"/>
+              </a:lnSpc>
+              <a:spcAft>
+                <a:spcPts val="1000"/>
+              </a:spcAft>
+              <a:defRPr sz="2000" b="0">
+                <a:solidFill>
+                  <a:srgbClr val="333333"/>
+                </a:solidFill>
+                <a:latin typeface="Calibri"/>
+              </a:defRPr>
+            </a:pPr>
+            <a:r>
+              <a:t>      `start`/`data_in` → `wait(!busy)` →</a:t>
+            </a:r>
+          </a:p>
+          <a:p>
+            <a:pPr>
+              <a:lnSpc>
+                <a:spcPts val="2200"/>
+              </a:lnSpc>
+              <a:spcAft>
+                <a:spcPts val="1000"/>
+              </a:spcAft>
+              <a:defRPr sz="2000" b="0">
+                <a:solidFill>
+                  <a:srgbClr val="333333"/>
+                </a:solidFill>
+                <a:latin typeface="Calibri"/>
+              </a:defRPr>
+            </a:pPr>
+            <a:r>
+              <a:t>      `wait(data_valid)` → com…</a:t>
+            </a:r>
+          </a:p>
+        </p:txBody>
+      </p:sp>
+      <p:sp>
+        <p:nvSpPr>
+          <p:cNvPr id="4" name="TextBox 3"/>
+          <p:cNvSpPr txBox="1"/>
+          <p:nvPr/>
+        </p:nvSpPr>
+        <p:spPr>
+          <a:xfrm>
+            <a:off x="548640" y="6355080"/>
+            <a:ext cx="11064240" cy="320040"/>
+          </a:xfrm>
+          <a:prstGeom prst="rect">
+            <a:avLst/>
+          </a:prstGeom>
+          <a:noFill/>
+        </p:spPr>
+        <p:txBody>
+          <a:bodyPr wrap="square">
+            <a:noAutofit/>
+          </a:bodyPr>
+          <a:lstStyle/>
+          <a:p>
+            <a:pPr algn="r">
+              <a:lnSpc>
+                <a:spcPts val="2200"/>
+              </a:lnSpc>
+              <a:defRPr sz="1000" b="0">
+                <a:solidFill>
+                  <a:srgbClr val="666666"/>
+                </a:solidFill>
+                <a:latin typeface="Calibri"/>
+              </a:defRPr>
+            </a:pPr>
+            <a:r>
+              <a:t>learn_uart_spi_i2c / Module 3</a:t>
+            </a:r>
+          </a:p>
+        </p:txBody>
+      </p:sp>
+    </p:spTree>
+  </p:cSld>
+  <p:clrMapOvr>
+    <a:masterClrMapping/>
+  </p:clrMapOvr>
+</p:sld>
+</file>
+
+<file path=ppt/slides/slide25.xml><?xml version="1.0" encoding="utf-8"?>
+<p:sld xmlns:a="http://schemas.openxmlformats.org/drawingml/2006/main" xmlns:p="http://schemas.openxmlformats.org/presentationml/2006/main" xmlns:r="http://schemas.openxmlformats.org/officeDocument/2006/relationships">
+  <p:cSld>
+    <p:spTree>
+      <p:nvGrpSpPr>
+        <p:cNvPr id="1" name=""/>
+        <p:cNvGrpSpPr/>
+        <p:nvPr/>
+      </p:nvGrpSpPr>
+      <p:grpSpPr/>
+      <p:sp>
+        <p:nvSpPr>
+          <p:cNvPr id="2" name="TextBox 1"/>
+          <p:cNvSpPr txBox="1"/>
+          <p:nvPr/>
+        </p:nvSpPr>
+        <p:spPr>
+          <a:xfrm>
+            <a:off x="548640" y="2743200"/>
+            <a:ext cx="11064240" cy="1371600"/>
+          </a:xfrm>
+          <a:prstGeom prst="rect">
+            <a:avLst/>
+          </a:prstGeom>
+          <a:noFill/>
+        </p:spPr>
+        <p:txBody>
+          <a:bodyPr wrap="square">
+            <a:noAutofit/>
+          </a:bodyPr>
+          <a:lstStyle/>
+          <a:p>
+            <a:pPr algn="ctr">
+              <a:lnSpc>
+                <a:spcPts val="2200"/>
+              </a:lnSpc>
+              <a:defRPr sz="3600" b="1">
+                <a:solidFill>
+                  <a:srgbClr val="1A1A2E"/>
+                </a:solidFill>
+                <a:latin typeface="Calibri"/>
+              </a:defRPr>
+            </a:pPr>
+            <a:r>
+              <a:t>Hands-on examples</a:t>
+            </a:r>
+          </a:p>
+        </p:txBody>
+      </p:sp>
+      <p:sp>
+        <p:nvSpPr>
+          <p:cNvPr id="3" name="TextBox 2"/>
+          <p:cNvSpPr txBox="1"/>
+          <p:nvPr/>
+        </p:nvSpPr>
+        <p:spPr>
+          <a:xfrm>
+            <a:off x="548640" y="6355080"/>
+            <a:ext cx="11064240" cy="320040"/>
+          </a:xfrm>
+          <a:prstGeom prst="rect">
+            <a:avLst/>
+          </a:prstGeom>
+          <a:noFill/>
+        </p:spPr>
+        <p:txBody>
+          <a:bodyPr wrap="square">
+            <a:noAutofit/>
+          </a:bodyPr>
+          <a:lstStyle/>
+          <a:p>
+            <a:pPr algn="r">
+              <a:lnSpc>
+                <a:spcPts val="2200"/>
+              </a:lnSpc>
+              <a:defRPr sz="1000" b="0">
+                <a:solidFill>
+                  <a:srgbClr val="666666"/>
+                </a:solidFill>
+                <a:latin typeface="Calibri"/>
+              </a:defRPr>
+            </a:pPr>
+            <a:r>
+              <a:t>learn_uart_spi_i2c / Module 3</a:t>
+            </a:r>
+          </a:p>
+        </p:txBody>
+      </p:sp>
+    </p:spTree>
+  </p:cSld>
+  <p:clrMapOvr>
+    <a:masterClrMapping/>
+  </p:clrMapOvr>
+</p:sld>
+</file>
+
+<file path=ppt/slides/slide26.xml><?xml version="1.0" encoding="utf-8"?>
+<p:sld xmlns:a="http://schemas.openxmlformats.org/drawingml/2006/main" xmlns:p="http://schemas.openxmlformats.org/presentationml/2006/main" xmlns:r="http://schemas.openxmlformats.org/officeDocument/2006/relationships">
+  <p:cSld>
+    <p:spTree>
+      <p:nvGrpSpPr>
+        <p:cNvPr id="1" name=""/>
+        <p:cNvGrpSpPr/>
+        <p:nvPr/>
+      </p:nvGrpSpPr>
+      <p:grpSpPr/>
+      <p:sp>
+        <p:nvSpPr>
+          <p:cNvPr id="2" name="TextBox 1"/>
+          <p:cNvSpPr txBox="1"/>
+          <p:nvPr/>
+        </p:nvSpPr>
+        <p:spPr>
+          <a:xfrm>
+            <a:off x="548640" y="411480"/>
+            <a:ext cx="11064240" cy="777240"/>
+          </a:xfrm>
+          <a:prstGeom prst="rect">
+            <a:avLst/>
+          </a:prstGeom>
+          <a:noFill/>
+        </p:spPr>
+        <p:txBody>
+          <a:bodyPr wrap="square">
+            <a:noAutofit/>
+          </a:bodyPr>
+          <a:lstStyle/>
+          <a:p>
+            <a:pPr>
+              <a:lnSpc>
+                <a:spcPts val="2200"/>
+              </a:lnSpc>
+              <a:defRPr sz="2800" b="1">
+                <a:solidFill>
+                  <a:srgbClr val="1A1A2E"/>
+                </a:solidFill>
+                <a:latin typeface="Calibri"/>
+              </a:defRPr>
+            </a:pPr>
+            <a:r>
+              <a:t>Module 3 self-check</a:t>
+            </a:r>
+          </a:p>
+        </p:txBody>
+      </p:sp>
+      <p:sp>
+        <p:nvSpPr>
+          <p:cNvPr id="3" name="TextBox 2"/>
+          <p:cNvSpPr txBox="1"/>
+          <p:nvPr/>
+        </p:nvSpPr>
+        <p:spPr>
+          <a:xfrm>
+            <a:off x="548640" y="1051560"/>
+            <a:ext cx="11064240" cy="914400"/>
+          </a:xfrm>
+          <a:prstGeom prst="rect">
+            <a:avLst/>
+          </a:prstGeom>
+          <a:solidFill>
+            <a:srgbClr val="F4F4F4"/>
+          </a:solidFill>
+        </p:spPr>
+        <p:txBody>
+          <a:bodyPr wrap="square">
+            <a:noAutofit/>
+          </a:bodyPr>
+          <a:lstStyle/>
+          <a:p>
+            <a:pPr>
+              <a:lnSpc>
+                <a:spcPts val="2200"/>
+              </a:lnSpc>
+              <a:spcAft>
+                <a:spcPts val="200"/>
+              </a:spcAft>
+              <a:defRPr sz="2000" b="0">
+                <a:solidFill>
+                  <a:srgbClr val="333333"/>
+                </a:solidFill>
+                <a:latin typeface="Consolas"/>
+              </a:defRPr>
+            </a:pPr>
+            <a:r>
+              <a:t>$ ./scripts/module3.sh --help</a:t>
+            </a:r>
+          </a:p>
+        </p:txBody>
+      </p:sp>
+      <p:pic>
+        <p:nvPicPr>
+          <p:cNvPr id="4" name="Picture 3" descr="module3_check.png"/>
+          <p:cNvPicPr>
+            <a:picLocks noChangeAspect="1"/>
+          </p:cNvPicPr>
+          <p:nvPr/>
+        </p:nvPicPr>
+        <p:blipFill>
+          <a:blip r:embed="rId2"/>
+          <a:stretch>
+            <a:fillRect/>
+          </a:stretch>
+        </p:blipFill>
+        <p:spPr>
+          <a:xfrm>
+            <a:off x="548640" y="1965960"/>
+            <a:ext cx="7071358" cy="3977639"/>
+          </a:xfrm>
+          <a:prstGeom prst="rect">
+            <a:avLst/>
+          </a:prstGeom>
+        </p:spPr>
+      </p:pic>
+      <p:sp>
+        <p:nvSpPr>
+          <p:cNvPr id="5" name="TextBox 4"/>
+          <p:cNvSpPr txBox="1"/>
+          <p:nvPr/>
+        </p:nvSpPr>
+        <p:spPr>
+          <a:xfrm>
+            <a:off x="548640" y="6355080"/>
+            <a:ext cx="11064240" cy="320040"/>
+          </a:xfrm>
+          <a:prstGeom prst="rect">
+            <a:avLst/>
+          </a:prstGeom>
+          <a:noFill/>
+        </p:spPr>
+        <p:txBody>
+          <a:bodyPr wrap="square">
+            <a:noAutofit/>
+          </a:bodyPr>
+          <a:lstStyle/>
+          <a:p>
+            <a:pPr algn="r">
+              <a:lnSpc>
+                <a:spcPts val="2200"/>
+              </a:lnSpc>
+              <a:defRPr sz="1000" b="0">
+                <a:solidFill>
+                  <a:srgbClr val="666666"/>
+                </a:solidFill>
+                <a:latin typeface="Calibri"/>
+              </a:defRPr>
+            </a:pPr>
+            <a:r>
+              <a:t>learn_uart_spi_i2c / Module 3</a:t>
+            </a:r>
+          </a:p>
+        </p:txBody>
+      </p:sp>
+    </p:spTree>
+  </p:cSld>
+  <p:clrMapOvr>
+    <a:masterClrMapping/>
+  </p:clrMapOvr>
+</p:sld>
+</file>
+
+<file path=ppt/slides/slide27.xml><?xml version="1.0" encoding="utf-8"?>
+<p:sld xmlns:a="http://schemas.openxmlformats.org/drawingml/2006/main" xmlns:p="http://schemas.openxmlformats.org/presentationml/2006/main" xmlns:r="http://schemas.openxmlformats.org/officeDocument/2006/relationships">
+  <p:cSld>
+    <p:spTree>
+      <p:nvGrpSpPr>
+        <p:cNvPr id="1" name=""/>
+        <p:cNvGrpSpPr/>
+        <p:nvPr/>
+      </p:nvGrpSpPr>
+      <p:grpSpPr/>
+      <p:sp>
+        <p:nvSpPr>
+          <p:cNvPr id="2" name="TextBox 1"/>
+          <p:cNvSpPr txBox="1"/>
+          <p:nvPr/>
+        </p:nvSpPr>
+        <p:spPr>
+          <a:xfrm>
+            <a:off x="548640" y="411480"/>
+            <a:ext cx="11064240" cy="777240"/>
+          </a:xfrm>
+          <a:prstGeom prst="rect">
+            <a:avLst/>
+          </a:prstGeom>
+          <a:noFill/>
+        </p:spPr>
+        <p:txBody>
+          <a:bodyPr wrap="square">
+            <a:noAutofit/>
+          </a:bodyPr>
+          <a:lstStyle/>
+          <a:p>
+            <a:pPr>
+              <a:lnSpc>
+                <a:spcPts val="2200"/>
+              </a:lnSpc>
+              <a:defRPr sz="2800" b="1">
+                <a:solidFill>
+                  <a:srgbClr val="1A1A2E"/>
+                </a:solidFill>
+                <a:latin typeface="Calibri"/>
+              </a:defRPr>
+            </a:pPr>
+            <a:r>
+              <a:t>Exercise scaffold</a:t>
+            </a:r>
+          </a:p>
+        </p:txBody>
+      </p:sp>
+      <p:sp>
+        <p:nvSpPr>
+          <p:cNvPr id="3" name="TextBox 2"/>
+          <p:cNvSpPr txBox="1"/>
+          <p:nvPr/>
+        </p:nvSpPr>
+        <p:spPr>
+          <a:xfrm>
+            <a:off x="548640" y="1143000"/>
+            <a:ext cx="11064240" cy="5029200"/>
+          </a:xfrm>
+          <a:prstGeom prst="rect">
+            <a:avLst/>
+          </a:prstGeom>
+          <a:solidFill>
+            <a:srgbClr val="F4F4F4"/>
+          </a:solidFill>
+        </p:spPr>
+        <p:txBody>
+          <a:bodyPr wrap="square">
+            <a:noAutofit/>
+          </a:bodyPr>
+          <a:lstStyle/>
+          <a:p>
+            <a:pPr>
+              <a:lnSpc>
+                <a:spcPts val="2200"/>
+              </a:lnSpc>
+              <a:spcAft>
+                <a:spcPts val="400"/>
+              </a:spcAft>
+              <a:defRPr sz="2000" b="0">
+                <a:solidFill>
+                  <a:srgbClr val="333333"/>
+                </a:solidFill>
+                <a:latin typeface="Consolas"/>
+              </a:defRPr>
+            </a:pPr>
+            <a:r>
+              <a:t>./scripts/module3.sh --scaffold</a:t>
+            </a:r>
+          </a:p>
+        </p:txBody>
+      </p:sp>
+      <p:sp>
+        <p:nvSpPr>
+          <p:cNvPr id="4" name="TextBox 3"/>
+          <p:cNvSpPr txBox="1"/>
+          <p:nvPr/>
+        </p:nvSpPr>
+        <p:spPr>
+          <a:xfrm>
+            <a:off x="548640" y="6355080"/>
+            <a:ext cx="11064240" cy="320040"/>
+          </a:xfrm>
+          <a:prstGeom prst="rect">
+            <a:avLst/>
+          </a:prstGeom>
+          <a:noFill/>
+        </p:spPr>
+        <p:txBody>
+          <a:bodyPr wrap="square">
+            <a:noAutofit/>
+          </a:bodyPr>
+          <a:lstStyle/>
+          <a:p>
+            <a:pPr algn="r">
+              <a:lnSpc>
+                <a:spcPts val="2200"/>
+              </a:lnSpc>
+              <a:defRPr sz="1000" b="0">
+                <a:solidFill>
+                  <a:srgbClr val="666666"/>
+                </a:solidFill>
+                <a:latin typeface="Calibri"/>
+              </a:defRPr>
+            </a:pPr>
+            <a:r>
+              <a:t>learn_uart_spi_i2c / Module 3</a:t>
+            </a:r>
+          </a:p>
+        </p:txBody>
+      </p:sp>
+    </p:spTree>
+  </p:cSld>
+  <p:clrMapOvr>
+    <a:masterClrMapping/>
+  </p:clrMapOvr>
+</p:sld>
+</file>
+
+<file path=ppt/slides/slide28.xml><?xml version="1.0" encoding="utf-8"?>
+<p:sld xmlns:a="http://schemas.openxmlformats.org/drawingml/2006/main" xmlns:p="http://schemas.openxmlformats.org/presentationml/2006/main" xmlns:r="http://schemas.openxmlformats.org/officeDocument/2006/relationships">
+  <p:cSld>
+    <p:spTree>
+      <p:nvGrpSpPr>
+        <p:cNvPr id="1" name=""/>
+        <p:cNvGrpSpPr/>
+        <p:nvPr/>
+      </p:nvGrpSpPr>
+      <p:grpSpPr/>
+      <p:sp>
+        <p:nvSpPr>
+          <p:cNvPr id="2" name="TextBox 1"/>
+          <p:cNvSpPr txBox="1"/>
+          <p:nvPr/>
+        </p:nvSpPr>
+        <p:spPr>
+          <a:xfrm>
+            <a:off x="548640" y="411480"/>
+            <a:ext cx="11064240" cy="777240"/>
+          </a:xfrm>
+          <a:prstGeom prst="rect">
+            <a:avLst/>
+          </a:prstGeom>
+          <a:noFill/>
+        </p:spPr>
+        <p:txBody>
+          <a:bodyPr wrap="square">
+            <a:noAutofit/>
+          </a:bodyPr>
+          <a:lstStyle/>
+          <a:p>
+            <a:pPr>
+              <a:lnSpc>
+                <a:spcPts val="2200"/>
+              </a:lnSpc>
+              <a:defRPr sz="2800" b="1">
+                <a:solidFill>
+                  <a:srgbClr val="1A1A2E"/>
+                </a:solidFill>
+                <a:latin typeface="Calibri"/>
+              </a:defRPr>
+            </a:pPr>
+            <a:r>
+              <a:t>Example 1: UART baseline</a:t>
+            </a:r>
+          </a:p>
+        </p:txBody>
+      </p:sp>
+      <p:sp>
+        <p:nvSpPr>
+          <p:cNvPr id="3" name="TextBox 2"/>
+          <p:cNvSpPr txBox="1"/>
+          <p:nvPr/>
+        </p:nvSpPr>
+        <p:spPr>
+          <a:xfrm>
+            <a:off x="548640" y="1234440"/>
+            <a:ext cx="11064240" cy="4937760"/>
+          </a:xfrm>
+          <a:prstGeom prst="rect">
+            <a:avLst/>
+          </a:prstGeom>
+          <a:noFill/>
+        </p:spPr>
+        <p:txBody>
+          <a:bodyPr wrap="square">
+            <a:noAutofit/>
+          </a:bodyPr>
+          <a:lstStyle/>
+          <a:p>
+            <a:pPr>
+              <a:lnSpc>
+                <a:spcPts val="2200"/>
+              </a:lnSpc>
+              <a:spcAft>
+                <a:spcPts val="1000"/>
+              </a:spcAft>
+              <a:defRPr sz="2000" b="0">
+                <a:solidFill>
+                  <a:srgbClr val="333333"/>
+                </a:solidFill>
+                <a:latin typeface="Calibri"/>
+              </a:defRPr>
+            </a:pPr>
+            <a:r>
+              <a:t>• `dut/`: `uart_tx.v`, `uart_rx.v`, `baud_gen.v`</a:t>
+            </a:r>
+          </a:p>
+          <a:p>
+            <a:pPr>
+              <a:lnSpc>
+                <a:spcPts val="2200"/>
+              </a:lnSpc>
+              <a:spcAft>
+                <a:spcPts val="1000"/>
+              </a:spcAft>
+              <a:defRPr sz="2000" b="0">
+                <a:solidFill>
+                  <a:srgbClr val="333333"/>
+                </a:solidFill>
+                <a:latin typeface="Calibri"/>
+              </a:defRPr>
+            </a:pPr>
+            <a:r>
+              <a:t>• `top_uart_baseline.sv`: Top with loopback; directed</a:t>
+            </a:r>
+          </a:p>
+          <a:p>
+            <a:pPr>
+              <a:lnSpc>
+                <a:spcPts val="2200"/>
+              </a:lnSpc>
+              <a:spcAft>
+                <a:spcPts val="1000"/>
+              </a:spcAft>
+              <a:defRPr sz="2000" b="0">
+                <a:solidFill>
+                  <a:srgbClr val="333333"/>
+                </a:solidFill>
+                <a:latin typeface="Calibri"/>
+              </a:defRPr>
+            </a:pPr>
+            <a:r>
+              <a:t>      stimulus and checks in initial blocks.</a:t>
+            </a:r>
+          </a:p>
+          <a:p>
+            <a:pPr>
+              <a:lnSpc>
+                <a:spcPts val="2200"/>
+              </a:lnSpc>
+              <a:spcAft>
+                <a:spcPts val="1000"/>
+              </a:spcAft>
+              <a:defRPr sz="2000" b="0">
+                <a:solidFill>
+                  <a:srgbClr val="333333"/>
+                </a:solidFill>
+                <a:latin typeface="Calibri"/>
+              </a:defRPr>
+            </a:pPr>
+            <a:r>
+              <a:t>• `sim_main.cpp`: C++ harness (clock, reset);</a:t>
+            </a:r>
+          </a:p>
+          <a:p>
+            <a:pPr>
+              <a:lnSpc>
+                <a:spcPts val="2200"/>
+              </a:lnSpc>
+              <a:spcAft>
+                <a:spcPts val="1000"/>
+              </a:spcAft>
+              <a:defRPr sz="2000" b="0">
+                <a:solidFill>
+                  <a:srgbClr val="333333"/>
+                </a:solidFill>
+                <a:latin typeface="Calibri"/>
+              </a:defRPr>
+            </a:pPr>
+            <a:r>
+              <a:t>      simulation runs until `$finish`.</a:t>
+            </a:r>
+          </a:p>
+        </p:txBody>
+      </p:sp>
+      <p:sp>
+        <p:nvSpPr>
+          <p:cNvPr id="4" name="TextBox 3"/>
+          <p:cNvSpPr txBox="1"/>
+          <p:nvPr/>
+        </p:nvSpPr>
+        <p:spPr>
+          <a:xfrm>
+            <a:off x="548640" y="6355080"/>
+            <a:ext cx="11064240" cy="320040"/>
+          </a:xfrm>
+          <a:prstGeom prst="rect">
+            <a:avLst/>
+          </a:prstGeom>
+          <a:noFill/>
+        </p:spPr>
+        <p:txBody>
+          <a:bodyPr wrap="square">
+            <a:noAutofit/>
+          </a:bodyPr>
+          <a:lstStyle/>
+          <a:p>
+            <a:pPr algn="r">
+              <a:lnSpc>
+                <a:spcPts val="2200"/>
+              </a:lnSpc>
+              <a:defRPr sz="1000" b="0">
+                <a:solidFill>
+                  <a:srgbClr val="666666"/>
+                </a:solidFill>
+                <a:latin typeface="Calibri"/>
+              </a:defRPr>
+            </a:pPr>
+            <a:r>
+              <a:t>learn_uart_spi_i2c / Module 3</a:t>
+            </a:r>
+          </a:p>
+        </p:txBody>
+      </p:sp>
+    </p:spTree>
+  </p:cSld>
+  <p:clrMapOvr>
+    <a:masterClrMapping/>
+  </p:clrMapOvr>
+</p:sld>
+</file>
+
+<file path=ppt/slides/slide29.xml><?xml version="1.0" encoding="utf-8"?>
+<p:sld xmlns:a="http://schemas.openxmlformats.org/drawingml/2006/main" xmlns:p="http://schemas.openxmlformats.org/presentationml/2006/main" xmlns:r="http://schemas.openxmlformats.org/officeDocument/2006/relationships">
+  <p:cSld>
+    <p:spTree>
+      <p:nvGrpSpPr>
+        <p:cNvPr id="1" name=""/>
+        <p:cNvGrpSpPr/>
+        <p:nvPr/>
+      </p:nvGrpSpPr>
+      <p:grpSpPr/>
+      <p:sp>
+        <p:nvSpPr>
+          <p:cNvPr id="2" name="TextBox 1"/>
+          <p:cNvSpPr txBox="1"/>
+          <p:nvPr/>
+        </p:nvSpPr>
+        <p:spPr>
+          <a:xfrm>
+            <a:off x="548640" y="411480"/>
+            <a:ext cx="11064240" cy="777240"/>
+          </a:xfrm>
+          <a:prstGeom prst="rect">
+            <a:avLst/>
+          </a:prstGeom>
+          <a:noFill/>
+        </p:spPr>
+        <p:txBody>
+          <a:bodyPr wrap="square">
+            <a:noAutofit/>
+          </a:bodyPr>
+          <a:lstStyle/>
+          <a:p>
+            <a:pPr>
+              <a:lnSpc>
+                <a:spcPts val="2200"/>
+              </a:lnSpc>
+              <a:defRPr sz="2800" b="1">
+                <a:solidFill>
+                  <a:srgbClr val="1A1A2E"/>
+                </a:solidFill>
+                <a:latin typeface="Calibri"/>
+              </a:defRPr>
+            </a:pPr>
+            <a:r>
+              <a:t>Demo: UART baseline</a:t>
+            </a:r>
+          </a:p>
+        </p:txBody>
+      </p:sp>
+      <p:sp>
+        <p:nvSpPr>
+          <p:cNvPr id="3" name="TextBox 2"/>
+          <p:cNvSpPr txBox="1"/>
+          <p:nvPr/>
+        </p:nvSpPr>
+        <p:spPr>
+          <a:xfrm>
+            <a:off x="548640" y="1051560"/>
+            <a:ext cx="11064240" cy="914400"/>
+          </a:xfrm>
+          <a:prstGeom prst="rect">
+            <a:avLst/>
+          </a:prstGeom>
+          <a:solidFill>
+            <a:srgbClr val="F4F4F4"/>
+          </a:solidFill>
+        </p:spPr>
+        <p:txBody>
+          <a:bodyPr wrap="square">
+            <a:noAutofit/>
+          </a:bodyPr>
+          <a:lstStyle/>
+          <a:p>
+            <a:pPr>
+              <a:lnSpc>
+                <a:spcPts val="2200"/>
+              </a:lnSpc>
+              <a:spcAft>
+                <a:spcPts val="200"/>
+              </a:spcAft>
+              <a:defRPr sz="2000" b="0">
+                <a:solidFill>
+                  <a:srgbClr val="333333"/>
+                </a:solidFill>
+                <a:latin typeface="Consolas"/>
+              </a:defRPr>
+            </a:pPr>
+            <a:r>
+              <a:t>$ ./scripts/module3.sh --run</a:t>
+            </a:r>
+          </a:p>
+        </p:txBody>
+      </p:sp>
+      <p:pic>
+        <p:nvPicPr>
+          <p:cNvPr id="4" name="Picture 3" descr="uart_baseline.png"/>
+          <p:cNvPicPr>
+            <a:picLocks noChangeAspect="1"/>
+          </p:cNvPicPr>
+          <p:nvPr/>
+        </p:nvPicPr>
+        <p:blipFill>
+          <a:blip r:embed="rId2"/>
+          <a:stretch>
+            <a:fillRect/>
+          </a:stretch>
+        </p:blipFill>
+        <p:spPr>
+          <a:xfrm>
+            <a:off x="548640" y="1965960"/>
+            <a:ext cx="7071358" cy="3977639"/>
+          </a:xfrm>
+          <a:prstGeom prst="rect">
+            <a:avLst/>
+          </a:prstGeom>
+        </p:spPr>
+      </p:pic>
+      <p:sp>
+        <p:nvSpPr>
+          <p:cNvPr id="5" name="TextBox 4"/>
           <p:cNvSpPr txBox="1"/>
           <p:nvPr/>
         </p:nvSpPr>
@@ -6736,6 +9149,977 @@
 </p:sld>
 </file>
 
+<file path=ppt/slides/slide30.xml><?xml version="1.0" encoding="utf-8"?>
+<p:sld xmlns:a="http://schemas.openxmlformats.org/drawingml/2006/main" xmlns:p="http://schemas.openxmlformats.org/presentationml/2006/main" xmlns:r="http://schemas.openxmlformats.org/officeDocument/2006/relationships">
+  <p:cSld>
+    <p:spTree>
+      <p:nvGrpSpPr>
+        <p:cNvPr id="1" name=""/>
+        <p:cNvGrpSpPr/>
+        <p:nvPr/>
+      </p:nvGrpSpPr>
+      <p:grpSpPr/>
+      <p:sp>
+        <p:nvSpPr>
+          <p:cNvPr id="2" name="TextBox 1"/>
+          <p:cNvSpPr txBox="1"/>
+          <p:nvPr/>
+        </p:nvSpPr>
+        <p:spPr>
+          <a:xfrm>
+            <a:off x="548640" y="2743200"/>
+            <a:ext cx="11064240" cy="1371600"/>
+          </a:xfrm>
+          <a:prstGeom prst="rect">
+            <a:avLst/>
+          </a:prstGeom>
+          <a:noFill/>
+        </p:spPr>
+        <p:txBody>
+          <a:bodyPr wrap="square">
+            <a:noAutofit/>
+          </a:bodyPr>
+          <a:lstStyle/>
+          <a:p>
+            <a:pPr algn="ctr">
+              <a:lnSpc>
+                <a:spcPts val="2200"/>
+              </a:lnSpc>
+              <a:defRPr sz="3600" b="1">
+                <a:solidFill>
+                  <a:srgbClr val="1A1A2E"/>
+                </a:solidFill>
+                <a:latin typeface="Calibri"/>
+              </a:defRPr>
+            </a:pPr>
+            <a:r>
+              <a:t>Practice &amp; assessment</a:t>
+            </a:r>
+          </a:p>
+        </p:txBody>
+      </p:sp>
+      <p:sp>
+        <p:nvSpPr>
+          <p:cNvPr id="3" name="TextBox 2"/>
+          <p:cNvSpPr txBox="1"/>
+          <p:nvPr/>
+        </p:nvSpPr>
+        <p:spPr>
+          <a:xfrm>
+            <a:off x="548640" y="6355080"/>
+            <a:ext cx="11064240" cy="320040"/>
+          </a:xfrm>
+          <a:prstGeom prst="rect">
+            <a:avLst/>
+          </a:prstGeom>
+          <a:noFill/>
+        </p:spPr>
+        <p:txBody>
+          <a:bodyPr wrap="square">
+            <a:noAutofit/>
+          </a:bodyPr>
+          <a:lstStyle/>
+          <a:p>
+            <a:pPr algn="r">
+              <a:lnSpc>
+                <a:spcPts val="2200"/>
+              </a:lnSpc>
+              <a:defRPr sz="1000" b="0">
+                <a:solidFill>
+                  <a:srgbClr val="666666"/>
+                </a:solidFill>
+                <a:latin typeface="Calibri"/>
+              </a:defRPr>
+            </a:pPr>
+            <a:r>
+              <a:t>learn_uart_spi_i2c / Module 3</a:t>
+            </a:r>
+          </a:p>
+        </p:txBody>
+      </p:sp>
+    </p:spTree>
+  </p:cSld>
+  <p:clrMapOvr>
+    <a:masterClrMapping/>
+  </p:clrMapOvr>
+</p:sld>
+</file>
+
+<file path=ppt/slides/slide31.xml><?xml version="1.0" encoding="utf-8"?>
+<p:sld xmlns:a="http://schemas.openxmlformats.org/drawingml/2006/main" xmlns:p="http://schemas.openxmlformats.org/presentationml/2006/main" xmlns:r="http://schemas.openxmlformats.org/officeDocument/2006/relationships">
+  <p:cSld>
+    <p:spTree>
+      <p:nvGrpSpPr>
+        <p:cNvPr id="1" name=""/>
+        <p:cNvGrpSpPr/>
+        <p:nvPr/>
+      </p:nvGrpSpPr>
+      <p:grpSpPr/>
+      <p:sp>
+        <p:nvSpPr>
+          <p:cNvPr id="2" name="TextBox 1"/>
+          <p:cNvSpPr txBox="1"/>
+          <p:nvPr/>
+        </p:nvSpPr>
+        <p:spPr>
+          <a:xfrm>
+            <a:off x="548640" y="411480"/>
+            <a:ext cx="11064240" cy="777240"/>
+          </a:xfrm>
+          <a:prstGeom prst="rect">
+            <a:avLst/>
+          </a:prstGeom>
+          <a:noFill/>
+        </p:spPr>
+        <p:txBody>
+          <a:bodyPr wrap="square">
+            <a:noAutofit/>
+          </a:bodyPr>
+          <a:lstStyle/>
+          <a:p>
+            <a:pPr>
+              <a:lnSpc>
+                <a:spcPts val="2200"/>
+              </a:lnSpc>
+              <a:defRPr sz="2800" b="1">
+                <a:solidFill>
+                  <a:srgbClr val="1A1A2E"/>
+                </a:solidFill>
+                <a:latin typeface="Calibri"/>
+              </a:defRPr>
+            </a:pPr>
+            <a:r>
+              <a:t>What you should know</a:t>
+            </a:r>
+          </a:p>
+        </p:txBody>
+      </p:sp>
+      <p:sp>
+        <p:nvSpPr>
+          <p:cNvPr id="3" name="TextBox 2"/>
+          <p:cNvSpPr txBox="1"/>
+          <p:nvPr/>
+        </p:nvSpPr>
+        <p:spPr>
+          <a:xfrm>
+            <a:off x="548640" y="1234440"/>
+            <a:ext cx="11064240" cy="4937760"/>
+          </a:xfrm>
+          <a:prstGeom prst="rect">
+            <a:avLst/>
+          </a:prstGeom>
+          <a:noFill/>
+        </p:spPr>
+        <p:txBody>
+          <a:bodyPr wrap="square">
+            <a:noAutofit/>
+          </a:bodyPr>
+          <a:lstStyle/>
+          <a:p>
+            <a:pPr>
+              <a:lnSpc>
+                <a:spcPts val="2200"/>
+              </a:lnSpc>
+              <a:spcAft>
+                <a:spcPts val="1000"/>
+              </a:spcAft>
+              <a:defRPr sz="2000" b="0">
+                <a:solidFill>
+                  <a:srgbClr val="333333"/>
+                </a:solidFill>
+                <a:latin typeface="Calibri"/>
+              </a:defRPr>
+            </a:pPr>
+            <a:r>
+              <a:t>• Describe UART 8N1 frame and baud timing.</a:t>
+            </a:r>
+          </a:p>
+          <a:p>
+            <a:pPr>
+              <a:lnSpc>
+                <a:spcPts val="2200"/>
+              </a:lnSpc>
+              <a:spcAft>
+                <a:spcPts val="1000"/>
+              </a:spcAft>
+              <a:defRPr sz="2000" b="0">
+                <a:solidFill>
+                  <a:srgbClr val="333333"/>
+                </a:solidFill>
+                <a:latin typeface="Calibri"/>
+              </a:defRPr>
+            </a:pPr>
+            <a:r>
+              <a:t>• Explain the role of uart_tx, uart_rx, and baud_gen.</a:t>
+            </a:r>
+          </a:p>
+          <a:p>
+            <a:pPr>
+              <a:lnSpc>
+                <a:spcPts val="2200"/>
+              </a:lnSpc>
+              <a:spcAft>
+                <a:spcPts val="1000"/>
+              </a:spcAft>
+              <a:defRPr sz="2000" b="0">
+                <a:solidFill>
+                  <a:srgbClr val="333333"/>
+                </a:solidFill>
+                <a:latin typeface="Calibri"/>
+              </a:defRPr>
+            </a:pPr>
+            <a:r>
+              <a:t>• Run the uart_baseline example and interpret the</a:t>
+            </a:r>
+          </a:p>
+          <a:p>
+            <a:pPr>
+              <a:lnSpc>
+                <a:spcPts val="2200"/>
+              </a:lnSpc>
+              <a:spcAft>
+                <a:spcPts val="1000"/>
+              </a:spcAft>
+              <a:defRPr sz="2000" b="0">
+                <a:solidFill>
+                  <a:srgbClr val="333333"/>
+                </a:solidFill>
+                <a:latin typeface="Calibri"/>
+              </a:defRPr>
+            </a:pPr>
+            <a:r>
+              <a:t>      loopback test.</a:t>
+            </a:r>
+          </a:p>
+          <a:p>
+            <a:pPr>
+              <a:lnSpc>
+                <a:spcPts val="2200"/>
+              </a:lnSpc>
+              <a:spcAft>
+                <a:spcPts val="1000"/>
+              </a:spcAft>
+              <a:defRPr sz="2000" b="0">
+                <a:solidFill>
+                  <a:srgbClr val="333333"/>
+                </a:solidFill>
+                <a:latin typeface="Calibri"/>
+              </a:defRPr>
+            </a:pPr>
+            <a:r>
+              <a:t>• Ready for Module 4: UART UVM+SV verification.</a:t>
+            </a:r>
+          </a:p>
+        </p:txBody>
+      </p:sp>
+      <p:sp>
+        <p:nvSpPr>
+          <p:cNvPr id="4" name="TextBox 3"/>
+          <p:cNvSpPr txBox="1"/>
+          <p:nvPr/>
+        </p:nvSpPr>
+        <p:spPr>
+          <a:xfrm>
+            <a:off x="548640" y="6355080"/>
+            <a:ext cx="11064240" cy="320040"/>
+          </a:xfrm>
+          <a:prstGeom prst="rect">
+            <a:avLst/>
+          </a:prstGeom>
+          <a:noFill/>
+        </p:spPr>
+        <p:txBody>
+          <a:bodyPr wrap="square">
+            <a:noAutofit/>
+          </a:bodyPr>
+          <a:lstStyle/>
+          <a:p>
+            <a:pPr algn="r">
+              <a:lnSpc>
+                <a:spcPts val="2200"/>
+              </a:lnSpc>
+              <a:defRPr sz="1000" b="0">
+                <a:solidFill>
+                  <a:srgbClr val="666666"/>
+                </a:solidFill>
+                <a:latin typeface="Calibri"/>
+              </a:defRPr>
+            </a:pPr>
+            <a:r>
+              <a:t>learn_uart_spi_i2c / Module 3</a:t>
+            </a:r>
+          </a:p>
+        </p:txBody>
+      </p:sp>
+    </p:spTree>
+  </p:cSld>
+  <p:clrMapOvr>
+    <a:masterClrMapping/>
+  </p:clrMapOvr>
+</p:sld>
+</file>
+
+<file path=ppt/slides/slide32.xml><?xml version="1.0" encoding="utf-8"?>
+<p:sld xmlns:a="http://schemas.openxmlformats.org/drawingml/2006/main" xmlns:p="http://schemas.openxmlformats.org/presentationml/2006/main" xmlns:r="http://schemas.openxmlformats.org/officeDocument/2006/relationships">
+  <p:cSld>
+    <p:spTree>
+      <p:nvGrpSpPr>
+        <p:cNvPr id="1" name=""/>
+        <p:cNvGrpSpPr/>
+        <p:nvPr/>
+      </p:nvGrpSpPr>
+      <p:grpSpPr/>
+      <p:sp>
+        <p:nvSpPr>
+          <p:cNvPr id="2" name="TextBox 1"/>
+          <p:cNvSpPr txBox="1"/>
+          <p:nvPr/>
+        </p:nvSpPr>
+        <p:spPr>
+          <a:xfrm>
+            <a:off x="548640" y="411480"/>
+            <a:ext cx="11064240" cy="777240"/>
+          </a:xfrm>
+          <a:prstGeom prst="rect">
+            <a:avLst/>
+          </a:prstGeom>
+          <a:noFill/>
+        </p:spPr>
+        <p:txBody>
+          <a:bodyPr wrap="square">
+            <a:noAutofit/>
+          </a:bodyPr>
+          <a:lstStyle/>
+          <a:p>
+            <a:pPr>
+              <a:lnSpc>
+                <a:spcPts val="2200"/>
+              </a:lnSpc>
+              <a:defRPr sz="2800" b="1">
+                <a:solidFill>
+                  <a:srgbClr val="1A1A2E"/>
+                </a:solidFill>
+                <a:latin typeface="Calibri"/>
+              </a:defRPr>
+            </a:pPr>
+            <a:r>
+              <a:t>Exercises</a:t>
+            </a:r>
+          </a:p>
+        </p:txBody>
+      </p:sp>
+      <p:sp>
+        <p:nvSpPr>
+          <p:cNvPr id="3" name="TextBox 2"/>
+          <p:cNvSpPr txBox="1"/>
+          <p:nvPr/>
+        </p:nvSpPr>
+        <p:spPr>
+          <a:xfrm>
+            <a:off x="548640" y="1234440"/>
+            <a:ext cx="11064240" cy="4937760"/>
+          </a:xfrm>
+          <a:prstGeom prst="rect">
+            <a:avLst/>
+          </a:prstGeom>
+          <a:noFill/>
+        </p:spPr>
+        <p:txBody>
+          <a:bodyPr wrap="square">
+            <a:noAutofit/>
+          </a:bodyPr>
+          <a:lstStyle/>
+          <a:p>
+            <a:pPr>
+              <a:lnSpc>
+                <a:spcPts val="2200"/>
+              </a:lnSpc>
+              <a:spcAft>
+                <a:spcPts val="1000"/>
+              </a:spcAft>
+              <a:defRPr sz="2000" b="0">
+                <a:solidFill>
+                  <a:srgbClr val="333333"/>
+                </a:solidFill>
+                <a:latin typeface="Calibri"/>
+              </a:defRPr>
+            </a:pPr>
+            <a:r>
+              <a:t>• Run uart_baseline</a:t>
+            </a:r>
+          </a:p>
+          <a:p>
+            <a:pPr>
+              <a:lnSpc>
+                <a:spcPts val="2200"/>
+              </a:lnSpc>
+              <a:spcAft>
+                <a:spcPts val="1000"/>
+              </a:spcAft>
+              <a:defRPr sz="2000" b="0">
+                <a:solidFill>
+                  <a:srgbClr val="333333"/>
+                </a:solidFill>
+                <a:latin typeface="Calibri"/>
+              </a:defRPr>
+            </a:pPr>
+            <a:r>
+              <a:t>• Trace one byte</a:t>
+            </a:r>
+          </a:p>
+          <a:p>
+            <a:pPr>
+              <a:lnSpc>
+                <a:spcPts val="2200"/>
+              </a:lnSpc>
+              <a:spcAft>
+                <a:spcPts val="1000"/>
+              </a:spcAft>
+              <a:defRPr sz="2000" b="0">
+                <a:solidFill>
+                  <a:srgbClr val="333333"/>
+                </a:solidFill>
+                <a:latin typeface="Calibri"/>
+              </a:defRPr>
+            </a:pPr>
+            <a:r>
+              <a:t>• Baud and divider</a:t>
+            </a:r>
+          </a:p>
+          <a:p>
+            <a:pPr>
+              <a:lnSpc>
+                <a:spcPts val="2200"/>
+              </a:lnSpc>
+              <a:spcAft>
+                <a:spcPts val="1000"/>
+              </a:spcAft>
+              <a:defRPr sz="2000" b="0">
+                <a:solidFill>
+                  <a:srgbClr val="333333"/>
+                </a:solidFill>
+                <a:latin typeface="Calibri"/>
+              </a:defRPr>
+            </a:pPr>
+            <a:r>
+              <a:t>• Optional: Waveforms</a:t>
+            </a:r>
+          </a:p>
+        </p:txBody>
+      </p:sp>
+      <p:sp>
+        <p:nvSpPr>
+          <p:cNvPr id="4" name="TextBox 3"/>
+          <p:cNvSpPr txBox="1"/>
+          <p:nvPr/>
+        </p:nvSpPr>
+        <p:spPr>
+          <a:xfrm>
+            <a:off x="548640" y="6355080"/>
+            <a:ext cx="11064240" cy="320040"/>
+          </a:xfrm>
+          <a:prstGeom prst="rect">
+            <a:avLst/>
+          </a:prstGeom>
+          <a:noFill/>
+        </p:spPr>
+        <p:txBody>
+          <a:bodyPr wrap="square">
+            <a:noAutofit/>
+          </a:bodyPr>
+          <a:lstStyle/>
+          <a:p>
+            <a:pPr algn="r">
+              <a:lnSpc>
+                <a:spcPts val="2200"/>
+              </a:lnSpc>
+              <a:defRPr sz="1000" b="0">
+                <a:solidFill>
+                  <a:srgbClr val="666666"/>
+                </a:solidFill>
+                <a:latin typeface="Calibri"/>
+              </a:defRPr>
+            </a:pPr>
+            <a:r>
+              <a:t>learn_uart_spi_i2c / Module 3</a:t>
+            </a:r>
+          </a:p>
+        </p:txBody>
+      </p:sp>
+    </p:spTree>
+  </p:cSld>
+  <p:clrMapOvr>
+    <a:masterClrMapping/>
+  </p:clrMapOvr>
+</p:sld>
+</file>
+
+<file path=ppt/slides/slide33.xml><?xml version="1.0" encoding="utf-8"?>
+<p:sld xmlns:a="http://schemas.openxmlformats.org/drawingml/2006/main" xmlns:p="http://schemas.openxmlformats.org/presentationml/2006/main" xmlns:r="http://schemas.openxmlformats.org/officeDocument/2006/relationships">
+  <p:cSld>
+    <p:spTree>
+      <p:nvGrpSpPr>
+        <p:cNvPr id="1" name=""/>
+        <p:cNvGrpSpPr/>
+        <p:nvPr/>
+      </p:nvGrpSpPr>
+      <p:grpSpPr/>
+      <p:sp>
+        <p:nvSpPr>
+          <p:cNvPr id="2" name="TextBox 1"/>
+          <p:cNvSpPr txBox="1"/>
+          <p:nvPr/>
+        </p:nvSpPr>
+        <p:spPr>
+          <a:xfrm>
+            <a:off x="548640" y="411480"/>
+            <a:ext cx="11064240" cy="777240"/>
+          </a:xfrm>
+          <a:prstGeom prst="rect">
+            <a:avLst/>
+          </a:prstGeom>
+          <a:noFill/>
+        </p:spPr>
+        <p:txBody>
+          <a:bodyPr wrap="square">
+            <a:noAutofit/>
+          </a:bodyPr>
+          <a:lstStyle/>
+          <a:p>
+            <a:pPr>
+              <a:lnSpc>
+                <a:spcPts val="2200"/>
+              </a:lnSpc>
+              <a:defRPr sz="2800" b="1">
+                <a:solidFill>
+                  <a:srgbClr val="1A1A2E"/>
+                </a:solidFill>
+                <a:latin typeface="Calibri"/>
+              </a:defRPr>
+            </a:pPr>
+            <a:r>
+              <a:t>Assessment checklist</a:t>
+            </a:r>
+          </a:p>
+        </p:txBody>
+      </p:sp>
+      <p:sp>
+        <p:nvSpPr>
+          <p:cNvPr id="3" name="TextBox 2"/>
+          <p:cNvSpPr txBox="1"/>
+          <p:nvPr/>
+        </p:nvSpPr>
+        <p:spPr>
+          <a:xfrm>
+            <a:off x="548640" y="1234440"/>
+            <a:ext cx="11064240" cy="4937760"/>
+          </a:xfrm>
+          <a:prstGeom prst="rect">
+            <a:avLst/>
+          </a:prstGeom>
+          <a:noFill/>
+        </p:spPr>
+        <p:txBody>
+          <a:bodyPr wrap="square">
+            <a:noAutofit/>
+          </a:bodyPr>
+          <a:lstStyle/>
+          <a:p>
+            <a:pPr>
+              <a:lnSpc>
+                <a:spcPts val="2200"/>
+              </a:lnSpc>
+              <a:spcAft>
+                <a:spcPts val="1000"/>
+              </a:spcAft>
+              <a:defRPr sz="2000" b="0">
+                <a:solidFill>
+                  <a:srgbClr val="333333"/>
+                </a:solidFill>
+                <a:latin typeface="Calibri"/>
+              </a:defRPr>
+            </a:pPr>
+            <a:r>
+              <a:t>• Can describe UART 8N1 (start bit, 8 data LSB first,</a:t>
+            </a:r>
+          </a:p>
+          <a:p>
+            <a:pPr>
+              <a:lnSpc>
+                <a:spcPts val="2200"/>
+              </a:lnSpc>
+              <a:spcAft>
+                <a:spcPts val="1000"/>
+              </a:spcAft>
+              <a:defRPr sz="2000" b="0">
+                <a:solidFill>
+                  <a:srgbClr val="333333"/>
+                </a:solidFill>
+                <a:latin typeface="Calibri"/>
+              </a:defRPr>
+            </a:pPr>
+            <a:r>
+              <a:t>      stop bit) and the role of baud_tick.</a:t>
+            </a:r>
+          </a:p>
+          <a:p>
+            <a:pPr>
+              <a:lnSpc>
+                <a:spcPts val="2200"/>
+              </a:lnSpc>
+              <a:spcAft>
+                <a:spcPts val="1000"/>
+              </a:spcAft>
+              <a:defRPr sz="2000" b="0">
+                <a:solidFill>
+                  <a:srgbClr val="333333"/>
+                </a:solidFill>
+                <a:latin typeface="Calibri"/>
+              </a:defRPr>
+            </a:pPr>
+            <a:r>
+              <a:t>• Can explain the role of uart_tx, uart_rx, and</a:t>
+            </a:r>
+          </a:p>
+          <a:p>
+            <a:pPr>
+              <a:lnSpc>
+                <a:spcPts val="2200"/>
+              </a:lnSpc>
+              <a:spcAft>
+                <a:spcPts val="1000"/>
+              </a:spcAft>
+              <a:defRPr sz="2000" b="0">
+                <a:solidFill>
+                  <a:srgbClr val="333333"/>
+                </a:solidFill>
+                <a:latin typeface="Calibri"/>
+              </a:defRPr>
+            </a:pPr>
+            <a:r>
+              <a:t>      baud_gen in the RTL.</a:t>
+            </a:r>
+          </a:p>
+          <a:p>
+            <a:pPr>
+              <a:lnSpc>
+                <a:spcPts val="2200"/>
+              </a:lnSpc>
+              <a:spcAft>
+                <a:spcPts val="1000"/>
+              </a:spcAft>
+              <a:defRPr sz="2000" b="0">
+                <a:solidFill>
+                  <a:srgbClr val="333333"/>
+                </a:solidFill>
+                <a:latin typeface="Calibri"/>
+              </a:defRPr>
+            </a:pPr>
+            <a:r>
+              <a:t>• Can run uart_baseline and interpret the loopback</a:t>
+            </a:r>
+          </a:p>
+          <a:p>
+            <a:pPr>
+              <a:lnSpc>
+                <a:spcPts val="2200"/>
+              </a:lnSpc>
+              <a:spcAft>
+                <a:spcPts val="1000"/>
+              </a:spcAft>
+              <a:defRPr sz="2000" b="0">
+                <a:solidFill>
+                  <a:srgbClr val="333333"/>
+                </a:solidFill>
+                <a:latin typeface="Calibri"/>
+              </a:defRPr>
+            </a:pPr>
+            <a:r>
+              <a:t>      test result.</a:t>
+            </a:r>
+          </a:p>
+          <a:p>
+            <a:pPr>
+              <a:lnSpc>
+                <a:spcPts val="2200"/>
+              </a:lnSpc>
+              <a:spcAft>
+                <a:spcPts val="1000"/>
+              </a:spcAft>
+              <a:defRPr sz="2000" b="0">
+                <a:solidFill>
+                  <a:srgbClr val="333333"/>
+                </a:solidFill>
+                <a:latin typeface="Calibri"/>
+              </a:defRPr>
+            </a:pPr>
+            <a:r>
+              <a:t>• Ready for Module 4: UART UVM+SV verification.</a:t>
+            </a:r>
+          </a:p>
+        </p:txBody>
+      </p:sp>
+      <p:sp>
+        <p:nvSpPr>
+          <p:cNvPr id="4" name="TextBox 3"/>
+          <p:cNvSpPr txBox="1"/>
+          <p:nvPr/>
+        </p:nvSpPr>
+        <p:spPr>
+          <a:xfrm>
+            <a:off x="548640" y="6355080"/>
+            <a:ext cx="11064240" cy="320040"/>
+          </a:xfrm>
+          <a:prstGeom prst="rect">
+            <a:avLst/>
+          </a:prstGeom>
+          <a:noFill/>
+        </p:spPr>
+        <p:txBody>
+          <a:bodyPr wrap="square">
+            <a:noAutofit/>
+          </a:bodyPr>
+          <a:lstStyle/>
+          <a:p>
+            <a:pPr algn="r">
+              <a:lnSpc>
+                <a:spcPts val="2200"/>
+              </a:lnSpc>
+              <a:defRPr sz="1000" b="0">
+                <a:solidFill>
+                  <a:srgbClr val="666666"/>
+                </a:solidFill>
+                <a:latin typeface="Calibri"/>
+              </a:defRPr>
+            </a:pPr>
+            <a:r>
+              <a:t>learn_uart_spi_i2c / Module 3</a:t>
+            </a:r>
+          </a:p>
+        </p:txBody>
+      </p:sp>
+    </p:spTree>
+  </p:cSld>
+  <p:clrMapOvr>
+    <a:masterClrMapping/>
+  </p:clrMapOvr>
+</p:sld>
+</file>
+
+<file path=ppt/slides/slide34.xml><?xml version="1.0" encoding="utf-8"?>
+<p:sld xmlns:a="http://schemas.openxmlformats.org/drawingml/2006/main" xmlns:p="http://schemas.openxmlformats.org/presentationml/2006/main" xmlns:r="http://schemas.openxmlformats.org/officeDocument/2006/relationships">
+  <p:cSld>
+    <p:spTree>
+      <p:nvGrpSpPr>
+        <p:cNvPr id="1" name=""/>
+        <p:cNvGrpSpPr/>
+        <p:nvPr/>
+      </p:nvGrpSpPr>
+      <p:grpSpPr/>
+      <p:sp>
+        <p:nvSpPr>
+          <p:cNvPr id="2" name="TextBox 1"/>
+          <p:cNvSpPr txBox="1"/>
+          <p:nvPr/>
+        </p:nvSpPr>
+        <p:spPr>
+          <a:xfrm>
+            <a:off x="548640" y="411480"/>
+            <a:ext cx="11064240" cy="777240"/>
+          </a:xfrm>
+          <a:prstGeom prst="rect">
+            <a:avLst/>
+          </a:prstGeom>
+          <a:noFill/>
+        </p:spPr>
+        <p:txBody>
+          <a:bodyPr wrap="square">
+            <a:noAutofit/>
+          </a:bodyPr>
+          <a:lstStyle/>
+          <a:p>
+            <a:pPr>
+              <a:lnSpc>
+                <a:spcPts val="2200"/>
+              </a:lnSpc>
+              <a:defRPr sz="2800" b="1">
+                <a:solidFill>
+                  <a:srgbClr val="1A1A2E"/>
+                </a:solidFill>
+                <a:latin typeface="Calibri"/>
+              </a:defRPr>
+            </a:pPr>
+            <a:r>
+              <a:t>Summary &amp; next steps</a:t>
+            </a:r>
+          </a:p>
+        </p:txBody>
+      </p:sp>
+      <p:sp>
+        <p:nvSpPr>
+          <p:cNvPr id="3" name="TextBox 2"/>
+          <p:cNvSpPr txBox="1"/>
+          <p:nvPr/>
+        </p:nvSpPr>
+        <p:spPr>
+          <a:xfrm>
+            <a:off x="548640" y="1234440"/>
+            <a:ext cx="11064240" cy="4937760"/>
+          </a:xfrm>
+          <a:prstGeom prst="rect">
+            <a:avLst/>
+          </a:prstGeom>
+          <a:noFill/>
+        </p:spPr>
+        <p:txBody>
+          <a:bodyPr wrap="square">
+            <a:noAutofit/>
+          </a:bodyPr>
+          <a:lstStyle/>
+          <a:p>
+            <a:pPr>
+              <a:lnSpc>
+                <a:spcPts val="2200"/>
+              </a:lnSpc>
+              <a:spcAft>
+                <a:spcPts val="1000"/>
+              </a:spcAft>
+              <a:defRPr sz="2000" b="0">
+                <a:solidFill>
+                  <a:srgbClr val="333333"/>
+                </a:solidFill>
+                <a:latin typeface="Calibri"/>
+              </a:defRPr>
+            </a:pPr>
+            <a:r>
+              <a:t>• Understand the UART protocol (8N1, baud), translate</a:t>
+            </a:r>
+          </a:p>
+          <a:p>
+            <a:pPr>
+              <a:lnSpc>
+                <a:spcPts val="2200"/>
+              </a:lnSpc>
+              <a:spcAft>
+                <a:spcPts val="1000"/>
+              </a:spcAft>
+              <a:defRPr sz="2000" b="0">
+                <a:solidFill>
+                  <a:srgbClr val="333333"/>
+                </a:solidFill>
+                <a:latin typeface="Calibri"/>
+              </a:defRPr>
+            </a:pPr>
+            <a:r>
+              <a:t>      it to RTL (TX, RX, baud gen), and verify with a…</a:t>
+            </a:r>
+          </a:p>
+          <a:p>
+            <a:pPr>
+              <a:lnSpc>
+                <a:spcPts val="2200"/>
+              </a:lnSpc>
+              <a:spcAft>
+                <a:spcPts val="1000"/>
+              </a:spcAft>
+              <a:defRPr sz="2000" b="0">
+                <a:solidFill>
+                  <a:srgbClr val="333333"/>
+                </a:solidFill>
+                <a:latin typeface="Calibri"/>
+              </a:defRPr>
+            </a:pPr>
+            <a:r>
+              <a:t>• Complete module3/CHECKLIST.md</a:t>
+            </a:r>
+          </a:p>
+          <a:p>
+            <a:pPr>
+              <a:lnSpc>
+                <a:spcPts val="2200"/>
+              </a:lnSpc>
+              <a:spcAft>
+                <a:spcPts val="1000"/>
+              </a:spcAft>
+              <a:defRPr sz="2000" b="0">
+                <a:solidFill>
+                  <a:srgbClr val="333333"/>
+                </a:solidFill>
+                <a:latin typeface="Calibri"/>
+              </a:defRPr>
+            </a:pPr>
+            <a:r>
+              <a:t>• Review module3/EXAMPLES.md and run each lab</a:t>
+            </a:r>
+          </a:p>
+          <a:p>
+            <a:pPr>
+              <a:lnSpc>
+                <a:spcPts val="2200"/>
+              </a:lnSpc>
+              <a:spcAft>
+                <a:spcPts val="1000"/>
+              </a:spcAft>
+              <a:defRPr sz="2000" b="0">
+                <a:solidFill>
+                  <a:srgbClr val="333333"/>
+                </a:solidFill>
+                <a:latin typeface="Calibri"/>
+              </a:defRPr>
+            </a:pPr>
+            <a:r>
+              <a:t>• Next: UART UVM+SV</a:t>
+            </a:r>
+          </a:p>
+        </p:txBody>
+      </p:sp>
+      <p:sp>
+        <p:nvSpPr>
+          <p:cNvPr id="4" name="TextBox 3"/>
+          <p:cNvSpPr txBox="1"/>
+          <p:nvPr/>
+        </p:nvSpPr>
+        <p:spPr>
+          <a:xfrm>
+            <a:off x="548640" y="6355080"/>
+            <a:ext cx="11064240" cy="320040"/>
+          </a:xfrm>
+          <a:prstGeom prst="rect">
+            <a:avLst/>
+          </a:prstGeom>
+          <a:noFill/>
+        </p:spPr>
+        <p:txBody>
+          <a:bodyPr wrap="square">
+            <a:noAutofit/>
+          </a:bodyPr>
+          <a:lstStyle/>
+          <a:p>
+            <a:pPr algn="r">
+              <a:lnSpc>
+                <a:spcPts val="2200"/>
+              </a:lnSpc>
+              <a:defRPr sz="1000" b="0">
+                <a:solidFill>
+                  <a:srgbClr val="666666"/>
+                </a:solidFill>
+                <a:latin typeface="Calibri"/>
+              </a:defRPr>
+            </a:pPr>
+            <a:r>
+              <a:t>learn_uart_spi_i2c / Module 3</a:t>
+            </a:r>
+          </a:p>
+        </p:txBody>
+      </p:sp>
+    </p:spTree>
+  </p:cSld>
+  <p:clrMapOvr>
+    <a:masterClrMapping/>
+  </p:clrMapOvr>
+</p:sld>
+</file>
+
 <file path=ppt/slides/slide4.xml><?xml version="1.0" encoding="utf-8"?>
 <p:sld xmlns:a="http://schemas.openxmlformats.org/drawingml/2006/main" xmlns:p="http://schemas.openxmlformats.org/presentationml/2006/main" xmlns:r="http://schemas.openxmlformats.org/officeDocument/2006/relationships">
   <p:cSld>
@@ -7077,7 +10461,7 @@
               </a:defRPr>
             </a:pPr>
             <a:r>
-              <a:t>Syllabus topics</a:t>
+              <a:t>How to learn this module</a:t>
             </a:r>
           </a:p>
         </p:txBody>
@@ -7173,7 +10557,7 @@
               </a:defRPr>
             </a:pPr>
             <a:r>
-              <a:t>1. UART Protocol (8N1) (1/4)</a:t>
+              <a:t>Suggested learning path</a:t>
             </a:r>
           </a:p>
         </p:txBody>
@@ -7215,216 +10599,102 @@
               </a:defRPr>
             </a:pPr>
             <a:r>
-              <a:t>• Signals: Serial line (tx/rx), idle high; system</a:t>
-            </a:r>
-          </a:p>
-          <a:p>
-            <a:pPr>
-              <a:lnSpc>
-                <a:spcPts val="2200"/>
-              </a:lnSpc>
-              <a:spcAft>
-                <a:spcPts val="1000"/>
-              </a:spcAft>
-              <a:defRPr sz="2000" b="0">
-                <a:solidFill>
-                  <a:srgbClr val="333333"/>
-                </a:solidFill>
-                <a:latin typeface="Calibri"/>
-              </a:defRPr>
-            </a:pPr>
-            <a:r>
-              <a:t>      clock; baud_tick (one pulse per bit time).</a:t>
-            </a:r>
-          </a:p>
-          <a:p>
-            <a:pPr>
-              <a:lnSpc>
-                <a:spcPts val="2200"/>
-              </a:lnSpc>
-              <a:spcAft>
-                <a:spcPts val="1000"/>
-              </a:spcAft>
-              <a:defRPr sz="2000" b="0">
-                <a:solidFill>
-                  <a:srgbClr val="333333"/>
-                </a:solidFill>
-                <a:latin typeface="Calibri"/>
-              </a:defRPr>
-            </a:pPr>
-            <a:r>
-              <a:t>• Frame: 1 start bit (0), 8 data bits (LSB first), 1</a:t>
-            </a:r>
-          </a:p>
-          <a:p>
-            <a:pPr>
-              <a:lnSpc>
-                <a:spcPts val="2200"/>
-              </a:lnSpc>
-              <a:spcAft>
-                <a:spcPts val="1000"/>
-              </a:spcAft>
-              <a:defRPr sz="2000" b="0">
-                <a:solidFill>
-                  <a:srgbClr val="333333"/>
-                </a:solidFill>
-                <a:latin typeface="Calibri"/>
-              </a:defRPr>
-            </a:pPr>
-            <a:r>
-              <a:t>      stop bit (1).</a:t>
-            </a:r>
-          </a:p>
-          <a:p>
-            <a:pPr>
-              <a:lnSpc>
-                <a:spcPts val="2200"/>
-              </a:lnSpc>
-              <a:spcAft>
-                <a:spcPts val="1000"/>
-              </a:spcAft>
-              <a:defRPr sz="2000" b="0">
-                <a:solidFill>
-                  <a:srgbClr val="333333"/>
-                </a:solidFill>
-                <a:latin typeface="Calibri"/>
-              </a:defRPr>
-            </a:pPr>
-            <a:r>
-              <a:t>• Timing: One bit per baud_tick; baud_tick derived</a:t>
-            </a:r>
-          </a:p>
-          <a:p>
-            <a:pPr>
-              <a:lnSpc>
-                <a:spcPts val="2200"/>
-              </a:lnSpc>
-              <a:spcAft>
-                <a:spcPts val="1000"/>
-              </a:spcAft>
-              <a:defRPr sz="2000" b="0">
-                <a:solidFill>
-                  <a:srgbClr val="333333"/>
-                </a:solidFill>
-                <a:latin typeface="Calibri"/>
-              </a:defRPr>
-            </a:pPr>
-            <a:r>
-              <a:t>      from system clock via a divider (e.g. DIVIDER = cl…</a:t>
-            </a:r>
-          </a:p>
-          <a:p>
-            <a:pPr>
-              <a:lnSpc>
-                <a:spcPts val="2200"/>
-              </a:lnSpc>
-              <a:spcAft>
-                <a:spcPts val="1000"/>
-              </a:spcAft>
-              <a:defRPr sz="2000" b="0">
-                <a:solidFill>
-                  <a:srgbClr val="333333"/>
-                </a:solidFill>
-                <a:latin typeface="Calibri"/>
-              </a:defRPr>
-            </a:pPr>
-            <a:r>
-              <a:t>• Framing: `idle=1` → `start=0` → 8 data bits (LSB</a:t>
-            </a:r>
-          </a:p>
-          <a:p>
-            <a:pPr>
-              <a:lnSpc>
-                <a:spcPts val="2200"/>
-              </a:lnSpc>
-              <a:spcAft>
-                <a:spcPts val="1000"/>
-              </a:spcAft>
-              <a:defRPr sz="2000" b="0">
-                <a:solidFill>
-                  <a:srgbClr val="333333"/>
-                </a:solidFill>
-                <a:latin typeface="Calibri"/>
-              </a:defRPr>
-            </a:pPr>
-            <a:r>
-              <a:t>      first) → `stop=1`.</a:t>
-            </a:r>
-          </a:p>
-          <a:p>
-            <a:pPr>
-              <a:lnSpc>
-                <a:spcPts val="2200"/>
-              </a:lnSpc>
-              <a:spcAft>
-                <a:spcPts val="1000"/>
-              </a:spcAft>
-              <a:defRPr sz="2000" b="0">
-                <a:solidFill>
-                  <a:srgbClr val="333333"/>
-                </a:solidFill>
-                <a:latin typeface="Calibri"/>
-              </a:defRPr>
-            </a:pPr>
-            <a:r>
-              <a:t>• Baud math: `DIVIDER = round(clk_hz / baud)`.</a:t>
-            </a:r>
-          </a:p>
-          <a:p>
-            <a:pPr>
-              <a:lnSpc>
-                <a:spcPts val="2200"/>
-              </a:lnSpc>
-              <a:spcAft>
-                <a:spcPts val="1000"/>
-              </a:spcAft>
-              <a:defRPr sz="2000" b="0">
-                <a:solidFill>
-                  <a:srgbClr val="333333"/>
-                </a:solidFill>
-                <a:latin typeface="Calibri"/>
-              </a:defRPr>
-            </a:pPr>
-            <a:r>
-              <a:t>      Example: 50 MHz clock, 115200 baud → divider ≈ 434.</a:t>
-            </a:r>
-          </a:p>
-          <a:p>
-            <a:pPr>
-              <a:lnSpc>
-                <a:spcPts val="2200"/>
-              </a:lnSpc>
-              <a:spcAft>
-                <a:spcPts val="1000"/>
-              </a:spcAft>
-              <a:defRPr sz="2000" b="0">
-                <a:solidFill>
-                  <a:srgbClr val="333333"/>
-                </a:solidFill>
-                <a:latin typeface="Calibri"/>
-              </a:defRPr>
-            </a:pPr>
-            <a:r>
-              <a:t>• Reset state: Line idles high, TX not busy, RX clears</a:t>
-            </a:r>
-          </a:p>
-          <a:p>
-            <a:pPr>
-              <a:lnSpc>
-                <a:spcPts val="2200"/>
-              </a:lnSpc>
-              <a:spcAft>
-                <a:spcPts val="1000"/>
-              </a:spcAft>
-              <a:defRPr sz="2000" b="0">
-                <a:solidFill>
-                  <a:srgbClr val="333333"/>
-                </a:solidFill>
-                <a:latin typeface="Calibri"/>
-              </a:defRPr>
-            </a:pPr>
-            <a:r>
-              <a:t>      internal shift register, `data_valid` low.</a:t>
+              <a:t>• Read the detailed UART learning guide:</a:t>
+            </a:r>
+          </a:p>
+          <a:p>
+            <a:pPr>
+              <a:lnSpc>
+                <a:spcPts val="2200"/>
+              </a:lnSpc>
+              <a:spcAft>
+                <a:spcPts val="1000"/>
+              </a:spcAft>
+              <a:defRPr sz="2000" b="0">
+                <a:solidFill>
+                  <a:srgbClr val="333333"/>
+                </a:solidFill>
+                <a:latin typeface="Calibri"/>
+              </a:defRPr>
+            </a:pPr>
+            <a:r>
+              <a:t>      UART_LEARNING_GUIDE.md — what UART is, what kind of</a:t>
+            </a:r>
+          </a:p>
+          <a:p>
+            <a:pPr>
+              <a:lnSpc>
+                <a:spcPts val="2200"/>
+              </a:lnSpc>
+              <a:spcAft>
+                <a:spcPts val="1000"/>
+              </a:spcAft>
+              <a:defRPr sz="2000" b="0">
+                <a:solidFill>
+                  <a:srgbClr val="333333"/>
+                </a:solidFill>
+                <a:latin typeface="Calibri"/>
+              </a:defRPr>
+            </a:pPr>
+            <a:r>
+              <a:t>      protocol…</a:t>
+            </a:r>
+          </a:p>
+          <a:p>
+            <a:pPr>
+              <a:lnSpc>
+                <a:spcPts val="2200"/>
+              </a:lnSpc>
+              <a:spcAft>
+                <a:spcPts val="1000"/>
+              </a:spcAft>
+              <a:defRPr sz="2000" b="0">
+                <a:solidFill>
+                  <a:srgbClr val="333333"/>
+                </a:solidFill>
+                <a:latin typeface="Calibri"/>
+              </a:defRPr>
+            </a:pPr>
+            <a:r>
+              <a:t>• Read the protocols + UVM overview:</a:t>
+            </a:r>
+          </a:p>
+          <a:p>
+            <a:pPr>
+              <a:lnSpc>
+                <a:spcPts val="2200"/>
+              </a:lnSpc>
+              <a:spcAft>
+                <a:spcPts val="1000"/>
+              </a:spcAft>
+              <a:defRPr sz="2000" b="0">
+                <a:solidFill>
+                  <a:srgbClr val="333333"/>
+                </a:solidFill>
+                <a:latin typeface="Calibri"/>
+              </a:defRPr>
+            </a:pPr>
+            <a:r>
+              <a:t>      LEARNING_GUIDE_PROTOCOLS_AND_UVM.md — Part B § 4.</a:t>
+            </a:r>
+          </a:p>
+          <a:p>
+            <a:pPr>
+              <a:lnSpc>
+                <a:spcPts val="2200"/>
+              </a:lnSpc>
+              <a:spcAft>
+                <a:spcPts val="1000"/>
+              </a:spcAft>
+              <a:defRPr sz="2000" b="0">
+                <a:solidFill>
+                  <a:srgbClr val="333333"/>
+                </a:solidFill>
+                <a:latin typeface="Calibri"/>
+              </a:defRPr>
+            </a:pPr>
+            <a:r>
+              <a:t>      When to Use Ba…</a:t>
             </a:r>
           </a:p>
         </p:txBody>
@@ -7494,8 +10764,8 @@
         </p:nvSpPr>
         <p:spPr>
           <a:xfrm>
-            <a:off x="548640" y="411480"/>
-            <a:ext cx="11064240" cy="777240"/>
+            <a:off x="548640" y="2743200"/>
+            <a:ext cx="11064240" cy="1371600"/>
           </a:xfrm>
           <a:prstGeom prst="rect">
             <a:avLst/>
@@ -7508,11 +10778,11 @@
           </a:bodyPr>
           <a:lstStyle/>
           <a:p>
-            <a:pPr>
-              <a:lnSpc>
-                <a:spcPts val="2200"/>
-              </a:lnSpc>
-              <a:defRPr sz="2800" b="1">
+            <a:pPr algn="ctr">
+              <a:lnSpc>
+                <a:spcPts val="2200"/>
+              </a:lnSpc>
+              <a:defRPr sz="3600" b="1">
                 <a:solidFill>
                   <a:srgbClr val="1A1A2E"/>
                 </a:solidFill>
@@ -7520,7 +10790,7 @@
               </a:defRPr>
             </a:pPr>
             <a:r>
-              <a:t>1. UART Protocol (8N1) (2/4)</a:t>
+              <a:t>Design architecture</a:t>
             </a:r>
           </a:p>
         </p:txBody>
@@ -7528,219 +10798,6 @@
       <p:sp>
         <p:nvSpPr>
           <p:cNvPr id="3" name="TextBox 2"/>
-          <p:cNvSpPr txBox="1"/>
-          <p:nvPr/>
-        </p:nvSpPr>
-        <p:spPr>
-          <a:xfrm>
-            <a:off x="548640" y="1234440"/>
-            <a:ext cx="11064240" cy="4937760"/>
-          </a:xfrm>
-          <a:prstGeom prst="rect">
-            <a:avLst/>
-          </a:prstGeom>
-          <a:noFill/>
-        </p:spPr>
-        <p:txBody>
-          <a:bodyPr wrap="square">
-            <a:noAutofit/>
-          </a:bodyPr>
-          <a:lstStyle/>
-          <a:p>
-            <a:pPr>
-              <a:lnSpc>
-                <a:spcPts val="2200"/>
-              </a:lnSpc>
-              <a:spcAft>
-                <a:spcPts val="1000"/>
-              </a:spcAft>
-              <a:defRPr sz="2000" b="0">
-                <a:solidFill>
-                  <a:srgbClr val="333333"/>
-                </a:solidFill>
-                <a:latin typeface="Calibri"/>
-              </a:defRPr>
-            </a:pPr>
-            <a:r>
-              <a:t>• Errors: `framing_error` when stop bit is not high at</a:t>
-            </a:r>
-          </a:p>
-          <a:p>
-            <a:pPr>
-              <a:lnSpc>
-                <a:spcPts val="2200"/>
-              </a:lnSpc>
-              <a:spcAft>
-                <a:spcPts val="1000"/>
-              </a:spcAft>
-              <a:defRPr sz="2000" b="0">
-                <a:solidFill>
-                  <a:srgbClr val="333333"/>
-                </a:solidFill>
-                <a:latin typeface="Calibri"/>
-              </a:defRPr>
-            </a:pPr>
-            <a:r>
-              <a:t>      expected sample; optional `parity_error` if pa…</a:t>
-            </a:r>
-          </a:p>
-          <a:p>
-            <a:pPr>
-              <a:lnSpc>
-                <a:spcPts val="2200"/>
-              </a:lnSpc>
-              <a:spcAft>
-                <a:spcPts val="1000"/>
-              </a:spcAft>
-              <a:defRPr sz="2000" b="0">
-                <a:solidFill>
-                  <a:srgbClr val="333333"/>
-                </a:solidFill>
-                <a:latin typeface="Calibri"/>
-              </a:defRPr>
-            </a:pPr>
-            <a:r>
-              <a:t>• Inputs: `clk`, `rst_n`, `baud_tick`, `start`,</a:t>
-            </a:r>
-          </a:p>
-          <a:p>
-            <a:pPr>
-              <a:lnSpc>
-                <a:spcPts val="2200"/>
-              </a:lnSpc>
-              <a:spcAft>
-                <a:spcPts val="1000"/>
-              </a:spcAft>
-              <a:defRPr sz="2000" b="0">
-                <a:solidFill>
-                  <a:srgbClr val="333333"/>
-                </a:solidFill>
-                <a:latin typeface="Calibri"/>
-              </a:defRPr>
-            </a:pPr>
-            <a:r>
-              <a:t>      `data_in[7:0]`.</a:t>
-            </a:r>
-          </a:p>
-          <a:p>
-            <a:pPr>
-              <a:lnSpc>
-                <a:spcPts val="2200"/>
-              </a:lnSpc>
-              <a:spcAft>
-                <a:spcPts val="1000"/>
-              </a:spcAft>
-              <a:defRPr sz="2000" b="0">
-                <a:solidFill>
-                  <a:srgbClr val="333333"/>
-                </a:solidFill>
-                <a:latin typeface="Calibri"/>
-              </a:defRPr>
-            </a:pPr>
-            <a:r>
-              <a:t>• Outputs: `tx`, `busy`.</a:t>
-            </a:r>
-          </a:p>
-          <a:p>
-            <a:pPr>
-              <a:lnSpc>
-                <a:spcPts val="2200"/>
-              </a:lnSpc>
-              <a:spcAft>
-                <a:spcPts val="1000"/>
-              </a:spcAft>
-              <a:defRPr sz="2000" b="0">
-                <a:solidFill>
-                  <a:srgbClr val="333333"/>
-                </a:solidFill>
-                <a:latin typeface="Calibri"/>
-              </a:defRPr>
-            </a:pPr>
-            <a:r>
-              <a:t>• Behavior: On `start`, latch `data_in`, drive start</a:t>
-            </a:r>
-          </a:p>
-          <a:p>
-            <a:pPr>
-              <a:lnSpc>
-                <a:spcPts val="2200"/>
-              </a:lnSpc>
-              <a:spcAft>
-                <a:spcPts val="1000"/>
-              </a:spcAft>
-              <a:defRPr sz="2000" b="0">
-                <a:solidFill>
-                  <a:srgbClr val="333333"/>
-                </a:solidFill>
-                <a:latin typeface="Calibri"/>
-              </a:defRPr>
-            </a:pPr>
-            <a:r>
-              <a:t>      bit low, then shift out bits [0:7] each `baud_ti…</a:t>
-            </a:r>
-          </a:p>
-          <a:p>
-            <a:pPr>
-              <a:lnSpc>
-                <a:spcPts val="2200"/>
-              </a:lnSpc>
-              <a:spcAft>
-                <a:spcPts val="1000"/>
-              </a:spcAft>
-              <a:defRPr sz="2000" b="0">
-                <a:solidFill>
-                  <a:srgbClr val="333333"/>
-                </a:solidFill>
-                <a:latin typeface="Calibri"/>
-              </a:defRPr>
-            </a:pPr>
-            <a:r>
-              <a:t>• Edge cases: Ignore `start` while `busy` (or queue it</a:t>
-            </a:r>
-          </a:p>
-          <a:p>
-            <a:pPr>
-              <a:lnSpc>
-                <a:spcPts val="2200"/>
-              </a:lnSpc>
-              <a:spcAft>
-                <a:spcPts val="1000"/>
-              </a:spcAft>
-              <a:defRPr sz="2000" b="0">
-                <a:solidFill>
-                  <a:srgbClr val="333333"/>
-                </a:solidFill>
-                <a:latin typeface="Calibri"/>
-              </a:defRPr>
-            </a:pPr>
-            <a:r>
-              <a:t>      in a FIFO if you extend the design).</a:t>
-            </a:r>
-          </a:p>
-          <a:p>
-            <a:pPr>
-              <a:lnSpc>
-                <a:spcPts val="2200"/>
-              </a:lnSpc>
-              <a:spcAft>
-                <a:spcPts val="1000"/>
-              </a:spcAft>
-              <a:defRPr sz="2000" b="0">
-                <a:solidFill>
-                  <a:srgbClr val="333333"/>
-                </a:solidFill>
-                <a:latin typeface="Calibri"/>
-              </a:defRPr>
-            </a:pPr>
-            <a:r>
-              <a:t>• Inputs: `clk`, `rst_n`, `baud_tick`, `rx`.</a:t>
-            </a:r>
-          </a:p>
-        </p:txBody>
-      </p:sp>
-      <p:sp>
-        <p:nvSpPr>
-          <p:cNvPr id="4" name="TextBox 3"/>
           <p:cNvSpPr txBox="1"/>
           <p:nvPr/>
         </p:nvSpPr>
@@ -7829,21 +10886,45 @@
               </a:defRPr>
             </a:pPr>
             <a:r>
-              <a:t>1. UART Protocol (8N1) (3/4)</a:t>
-            </a:r>
-          </a:p>
-        </p:txBody>
-      </p:sp>
-      <p:sp>
-        <p:nvSpPr>
-          <p:cNvPr id="3" name="TextBox 2"/>
+              <a:t>RTL / block architecture</a:t>
+            </a:r>
+          </a:p>
+        </p:txBody>
+      </p:sp>
+      <p:pic>
+        <p:nvPicPr>
+          <p:cNvPr id="3" name="Picture 2" descr="rtl_architecture.png"/>
+          <p:cNvPicPr>
+            <a:picLocks noChangeAspect="1"/>
+          </p:cNvPicPr>
+          <p:nvPr/>
+        </p:nvPicPr>
+        <p:blipFill>
+          <a:blip r:embed="rId2"/>
+          <a:stretch>
+            <a:fillRect/>
+          </a:stretch>
+        </p:blipFill>
+        <p:spPr>
+          <a:xfrm>
+            <a:off x="548640" y="1143000"/>
+            <a:ext cx="8128000" cy="4572000"/>
+          </a:xfrm>
+          <a:prstGeom prst="rect">
+            <a:avLst/>
+          </a:prstGeom>
+        </p:spPr>
+      </p:pic>
+      <p:sp>
+        <p:nvSpPr>
+          <p:cNvPr id="4" name="TextBox 3"/>
           <p:cNvSpPr txBox="1"/>
           <p:nvPr/>
         </p:nvSpPr>
         <p:spPr>
           <a:xfrm>
-            <a:off x="548640" y="1234440"/>
-            <a:ext cx="11064240" cy="4937760"/>
+            <a:off x="548640" y="5897880"/>
+            <a:ext cx="11064240" cy="411480"/>
           </a:xfrm>
           <a:prstGeom prst="rect">
             <a:avLst/>
@@ -7860,215 +10941,22 @@
               <a:lnSpc>
                 <a:spcPts val="2200"/>
               </a:lnSpc>
-              <a:spcAft>
-                <a:spcPts val="1000"/>
-              </a:spcAft>
-              <a:defRPr sz="2000" b="0">
-                <a:solidFill>
-                  <a:srgbClr val="333333"/>
-                </a:solidFill>
-                <a:latin typeface="Calibri"/>
-              </a:defRPr>
-            </a:pPr>
-            <a:r>
-              <a:t>• Outputs: `data_out[7:0]`, `data_valid` (pulse),</a:t>
-            </a:r>
-          </a:p>
-          <a:p>
-            <a:pPr>
-              <a:lnSpc>
-                <a:spcPts val="2200"/>
-              </a:lnSpc>
-              <a:spcAft>
-                <a:spcPts val="1000"/>
-              </a:spcAft>
-              <a:defRPr sz="2000" b="0">
-                <a:solidFill>
-                  <a:srgbClr val="333333"/>
-                </a:solidFill>
-                <a:latin typeface="Calibri"/>
-              </a:defRPr>
-            </a:pPr>
-            <a:r>
-              <a:t>      `framing_error`.</a:t>
-            </a:r>
-          </a:p>
-          <a:p>
-            <a:pPr>
-              <a:lnSpc>
-                <a:spcPts val="2200"/>
-              </a:lnSpc>
-              <a:spcAft>
-                <a:spcPts val="1000"/>
-              </a:spcAft>
-              <a:defRPr sz="2000" b="0">
-                <a:solidFill>
-                  <a:srgbClr val="333333"/>
-                </a:solidFill>
-                <a:latin typeface="Calibri"/>
-              </a:defRPr>
-            </a:pPr>
-            <a:r>
-              <a:t>• Robustness options: Add metastability sync on `rx`;</a:t>
-            </a:r>
-          </a:p>
-          <a:p>
-            <a:pPr>
-              <a:lnSpc>
-                <a:spcPts val="2200"/>
-              </a:lnSpc>
-              <a:spcAft>
-                <a:spcPts val="1000"/>
-              </a:spcAft>
-              <a:defRPr sz="2000" b="0">
-                <a:solidFill>
-                  <a:srgbClr val="333333"/>
-                </a:solidFill>
-                <a:latin typeface="Calibri"/>
-              </a:defRPr>
-            </a:pPr>
-            <a:r>
-              <a:t>      add oversampling + majority vote; add `rx_ready…</a:t>
-            </a:r>
-          </a:p>
-          <a:p>
-            <a:pPr>
-              <a:lnSpc>
-                <a:spcPts val="2200"/>
-              </a:lnSpc>
-              <a:spcAft>
-                <a:spcPts val="1000"/>
-              </a:spcAft>
-              <a:defRPr sz="2000" b="0">
-                <a:solidFill>
-                  <a:srgbClr val="333333"/>
-                </a:solidFill>
-                <a:latin typeface="Calibri"/>
-              </a:defRPr>
-            </a:pPr>
-            <a:r>
-              <a:t>• Inputs: `clk`, `rst_n`, `divisor` (constant</a:t>
-            </a:r>
-          </a:p>
-          <a:p>
-            <a:pPr>
-              <a:lnSpc>
-                <a:spcPts val="2200"/>
-              </a:lnSpc>
-              <a:spcAft>
-                <a:spcPts val="1000"/>
-              </a:spcAft>
-              <a:defRPr sz="2000" b="0">
-                <a:solidFill>
-                  <a:srgbClr val="333333"/>
-                </a:solidFill>
-                <a:latin typeface="Calibri"/>
-              </a:defRPr>
-            </a:pPr>
-            <a:r>
-              <a:t>      parameter in the baseline).</a:t>
-            </a:r>
-          </a:p>
-          <a:p>
-            <a:pPr>
-              <a:lnSpc>
-                <a:spcPts val="2200"/>
-              </a:lnSpc>
-              <a:spcAft>
-                <a:spcPts val="1000"/>
-              </a:spcAft>
-              <a:defRPr sz="2000" b="0">
-                <a:solidFill>
-                  <a:srgbClr val="333333"/>
-                </a:solidFill>
-                <a:latin typeface="Calibri"/>
-              </a:defRPr>
-            </a:pPr>
-            <a:r>
-              <a:t>• Output: `baud_tick` high for one cycle every</a:t>
-            </a:r>
-          </a:p>
-          <a:p>
-            <a:pPr>
-              <a:lnSpc>
-                <a:spcPts val="2200"/>
-              </a:lnSpc>
-              <a:spcAft>
-                <a:spcPts val="1000"/>
-              </a:spcAft>
-              <a:defRPr sz="2000" b="0">
-                <a:solidFill>
-                  <a:srgbClr val="333333"/>
-                </a:solidFill>
-                <a:latin typeface="Calibri"/>
-              </a:defRPr>
-            </a:pPr>
-            <a:r>
-              <a:t>      `divisor` clocks.</a:t>
-            </a:r>
-          </a:p>
-          <a:p>
-            <a:pPr>
-              <a:lnSpc>
-                <a:spcPts val="2200"/>
-              </a:lnSpc>
-              <a:spcAft>
-                <a:spcPts val="1000"/>
-              </a:spcAft>
-              <a:defRPr sz="2000" b="0">
-                <a:solidFill>
-                  <a:srgbClr val="333333"/>
-                </a:solidFill>
-                <a:latin typeface="Calibri"/>
-              </a:defRPr>
-            </a:pPr>
-            <a:r>
-              <a:t>• For synthesis, keep the counter simple (`divisor-1`</a:t>
-            </a:r>
-          </a:p>
-          <a:p>
-            <a:pPr>
-              <a:lnSpc>
-                <a:spcPts val="2200"/>
-              </a:lnSpc>
-              <a:spcAft>
-                <a:spcPts val="1000"/>
-              </a:spcAft>
-              <a:defRPr sz="2000" b="0">
-                <a:solidFill>
-                  <a:srgbClr val="333333"/>
-                </a:solidFill>
-                <a:latin typeface="Calibri"/>
-              </a:defRPr>
-            </a:pPr>
-            <a:r>
-              <a:t>      down-counter or up-counter compare). For sim, y…</a:t>
-            </a:r>
-          </a:p>
-          <a:p>
-            <a:pPr>
-              <a:lnSpc>
-                <a:spcPts val="2200"/>
-              </a:lnSpc>
-              <a:spcAft>
-                <a:spcPts val="1000"/>
-              </a:spcAft>
-              <a:defRPr sz="2000" b="0">
-                <a:solidFill>
-                  <a:srgbClr val="333333"/>
-                </a:solidFill>
-                <a:latin typeface="Calibri"/>
-              </a:defRPr>
-            </a:pPr>
-            <a:r>
-              <a:t>• Data bits: 5–9 data bits are common.</a:t>
-            </a:r>
-          </a:p>
-        </p:txBody>
-      </p:sp>
-      <p:sp>
-        <p:nvSpPr>
-          <p:cNvPr id="4" name="TextBox 3"/>
+              <a:defRPr sz="1200" b="0">
+                <a:solidFill>
+                  <a:srgbClr val="333333"/>
+                </a:solidFill>
+                <a:latin typeface="Calibri"/>
+              </a:defRPr>
+            </a:pPr>
+            <a:r>
+              <a:t>Module 3: DUT / block hierarchy (see module3/examples/).</a:t>
+            </a:r>
+          </a:p>
+        </p:txBody>
+      </p:sp>
+      <p:sp>
+        <p:nvSpPr>
+          <p:cNvPr id="5" name="TextBox 4"/>
           <p:cNvSpPr txBox="1"/>
           <p:nvPr/>
         </p:nvSpPr>
